--- a/artifacts/speaking-portfolio-expanded/talks/judgment/judgment-40min-screen.pptx
+++ b/artifacts/speaking-portfolio-expanded/talks/judgment/judgment-40min-screen.pptx
@@ -106,7 +106,7 @@
                 <a:ea typeface="Arial"/>
                 <a:cs typeface="Arial"/>
               </a:rPr>
-              <a:t xml:space="preserve">The morning four good implementations arrive</a:t>
+              <a:t xml:space="preserve">These go to eleven</a:t>
             </a:r>
             <a:endParaRPr lang="en-US" sz="1200"/>
           </a:p>
@@ -198,30 +198,30 @@
                 <a:ea typeface="Arial"/>
                 <a:cs typeface="Arial"/>
               </a:rPr>
-              <a:t xml:space="preserve">&gt; 95% utilized → 19× waiting</a:t>
-            </a:r>
-            <a:endParaRPr lang="en-US" sz="1200"/>
-          </a:p>
-          <a:p>
-            <a:pPr marL="0" indent="0">
-              <a:lnSpc>
-                <a:spcPts val="1560"/>
-              </a:lnSpc>
-              <a:spcAft>
-                <a:spcPts val="0"/>
-              </a:spcAft>
-              <a:buNone/>
-            </a:pPr>
-            <a:r>
-              <a:rPr lang="en-US" sz="1200" b="0">
-                <a:solidFill>
-                  <a:srgbClr val="202b33"/>
-                </a:solidFill>
-                <a:latin typeface="Arial"/>
-                <a:ea typeface="Arial"/>
-                <a:cs typeface="Arial"/>
-              </a:rPr>
-              <a:t xml:space="preserve">&gt; Four plausible implementations. One reviewer.</a:t>
+              <a:t xml:space="preserve">&gt; Code is free. Features are free.</a:t>
+            </a:r>
+            <a:endParaRPr lang="en-US" sz="1200"/>
+          </a:p>
+          <a:p>
+            <a:pPr marL="0" indent="0">
+              <a:lnSpc>
+                <a:spcPts val="1560"/>
+              </a:lnSpc>
+              <a:spcAft>
+                <a:spcPts val="0"/>
+              </a:spcAft>
+              <a:buNone/>
+            </a:pPr>
+            <a:r>
+              <a:rPr lang="en-US" sz="1200" b="0">
+                <a:solidFill>
+                  <a:srgbClr val="202b33"/>
+                </a:solidFill>
+                <a:latin typeface="Arial"/>
+                <a:ea typeface="Arial"/>
+                <a:cs typeface="Arial"/>
+              </a:rPr>
+              <a:t xml:space="preserve">&gt; Attention is the budget.</a:t>
             </a:r>
             <a:endParaRPr lang="en-US" sz="1200"/>
           </a:p>
@@ -267,7 +267,7 @@
                 <a:ea typeface="Arial"/>
                 <a:cs typeface="Arial"/>
               </a:rPr>
-              <a:t xml:space="preserve">Four good implementations arrive before lunch. The reviewer is still on yesterday's change. Generation got cheaper. Delivery acquired a queue.</a:t>
+              <a:t xml:space="preserve">Four features shipped before lunch. All four work. All four have tests. Your best customer opens the app for the first time in six weeks and cannot find the button she used every Friday. Nobody filed a bug.</a:t>
             </a:r>
             <a:endParaRPr lang="en-US" sz="1200"/>
           </a:p>
@@ -313,7 +313,7 @@
                 <a:ea typeface="Arial"/>
                 <a:cs typeface="Arial"/>
               </a:rPr>
-              <a:t xml:space="preserve">If your organization uses AI to build an infinite feature machine, you have tragically missed the potential of the magic AI genie. We can spend the gain on fewer defects and smaller changes. We do not have to spend it all on more code.</a:t>
+              <a:t xml:space="preserve">Here is the line this talk has to earn. Don't count what the feature cost you to build, count what it costs them to relearn.</a:t>
             </a:r>
             <a:endParaRPr lang="en-US" sz="1200"/>
           </a:p>
@@ -359,7 +359,7 @@
                 <a:ea typeface="Arial"/>
                 <a:cs typeface="Arial"/>
               </a:rPr>
-              <a:t xml:space="preserve">Here is the scope once: the queue and permission examples are teaching models, not measurements of your team. The nineteen-times wait assumes one server and a variability factor of one. We will do the arithmetic. The argument is that protecting review capacity belongs upstream, where we decide what enters the queue.</a:t>
+              <a:t xml:space="preserve">The title is a Spinal Tap joke and it is load-bearing. Turn the reasoning budget up to eleven. More tokens buy more consideration of situations the model has already seen. They do not buy taste, and they do not tell you which Tuesday.</a:t>
             </a:r>
             <a:endParaRPr lang="en-US" sz="1200"/>
           </a:p>
@@ -405,7 +405,53 @@
                 <a:ea typeface="Arial"/>
                 <a:cs typeface="Arial"/>
               </a:rPr>
-              <a:t xml:space="preserve">Story: The change that waited longer for review than it took to write. Bring arrival, first-review, and acceptance timestamps.</a:t>
+              <a:t xml:space="preserve">Scope, once. The arithmetic later is counting, not a measurement of your team, and the two futures at the end are labeled predictions I have not measured.</a:t>
+            </a:r>
+            <a:endParaRPr lang="en-US" sz="1200"/>
+          </a:p>
+          <a:p>
+            <a:pPr marL="0" indent="0">
+              <a:lnSpc>
+                <a:spcPts val="1560"/>
+              </a:lnSpc>
+              <a:spcAft>
+                <a:spcPts val="0"/>
+              </a:spcAft>
+              <a:buNone/>
+            </a:pPr>
+            <a:r>
+              <a:rPr lang="en-US" sz="1200" b="0">
+                <a:solidFill>
+                  <a:srgbClr val="202b33"/>
+                </a:solidFill>
+                <a:latin typeface="Arial"/>
+                <a:ea typeface="Arial"/>
+                <a:cs typeface="Arial"/>
+              </a:rPr>
+              <a:t xml:space="preserve"/>
+            </a:r>
+            <a:endParaRPr lang="en-US" sz="1200"/>
+          </a:p>
+          <a:p>
+            <a:pPr marL="0" indent="0">
+              <a:lnSpc>
+                <a:spcPts val="1560"/>
+              </a:lnSpc>
+              <a:spcAft>
+                <a:spcPts val="0"/>
+              </a:spcAft>
+              <a:buNone/>
+            </a:pPr>
+            <a:r>
+              <a:rPr lang="en-US" sz="1200" b="0">
+                <a:solidFill>
+                  <a:srgbClr val="202b33"/>
+                </a:solidFill>
+                <a:latin typeface="Arial"/>
+                <a:ea typeface="Arial"/>
+                <a:cs typeface="Arial"/>
+              </a:rPr>
+              <a:t xml:space="preserve">Story: The feature you were proudest of that a long-absent customer experienced as a broken workflow. Bring the ticket, the gap between their sessions, and what they actually said.</a:t>
             </a:r>
             <a:endParaRPr lang="en-US" sz="1200"/>
           </a:p>
@@ -518,7 +564,7 @@
                 <a:ea typeface="Arial"/>
                 <a:cs typeface="Arial"/>
               </a:rPr>
-              <a:t xml:space="preserve">Do not appoint a crumple zone</a:t>
+              <a:t xml:space="preserve">Prediction: the version picker</a:t>
             </a:r>
             <a:endParaRPr lang="en-US" sz="1200"/>
           </a:p>
@@ -564,7 +610,7 @@
                 <a:ea typeface="Arial"/>
                 <a:cs typeface="Arial"/>
               </a:rPr>
-              <a:t xml:space="preserve">26:00 to 29:00 · build</a:t>
+              <a:t xml:space="preserve">26:00 to 29:30 · build</a:t>
             </a:r>
             <a:endParaRPr lang="en-US" sz="1200"/>
           </a:p>
@@ -610,30 +656,7 @@
                 <a:ea typeface="Arial"/>
                 <a:cs typeface="Arial"/>
               </a:rPr>
-              <a:t xml:space="preserve">&gt; Responsibility must come with control</a:t>
-            </a:r>
-            <a:endParaRPr lang="en-US" sz="1200"/>
-          </a:p>
-          <a:p>
-            <a:pPr marL="0" indent="0">
-              <a:lnSpc>
-                <a:spcPts val="1560"/>
-              </a:lnSpc>
-              <a:spcAft>
-                <a:spcPts val="0"/>
-              </a:spcAft>
-              <a:buNone/>
-            </a:pPr>
-            <a:r>
-              <a:rPr lang="en-US" sz="1200" b="0">
-                <a:solidFill>
-                  <a:srgbClr val="202b33"/>
-                </a:solidFill>
-                <a:latin typeface="Arial"/>
-                <a:ea typeface="Arial"/>
-                <a:cs typeface="Arial"/>
-              </a:rPr>
-              <a:t xml:space="preserve">&gt; Who accepts, recovers, and maintains?</a:t>
+              <a:t xml:space="preserve">![A settings panel where version sits beside theme and language](../../../../public/talks/assets/judgment/version-picker.svg)</a:t>
             </a:r>
             <a:endParaRPr lang="en-US" sz="1200"/>
           </a:p>
@@ -679,7 +702,30 @@
                 <a:ea typeface="Arial"/>
                 <a:cs typeface="Arial"/>
               </a:rPr>
-              <a:t xml:space="preserve">Elish calls the human who absorbs blame without enough control a moral crumple zone. Put an engineer at the end of an automated pipeline, give them two minutes to approve a diff, and announce that responsibility stayed human. The org chart looks excellent. We did not remove the bottleneck. We moved it onto one person and gave them a keyboard shortcut for approving things.</a:t>
+              <a:t xml:space="preserve">&gt; Theme · Language · Version</a:t>
+            </a:r>
+            <a:endParaRPr lang="en-US" sz="1200"/>
+          </a:p>
+          <a:p>
+            <a:pPr marL="0" indent="0">
+              <a:lnSpc>
+                <a:spcPts val="1560"/>
+              </a:lnSpc>
+              <a:spcAft>
+                <a:spcPts val="0"/>
+              </a:spcAft>
+              <a:buNone/>
+            </a:pPr>
+            <a:r>
+              <a:rPr lang="en-US" sz="1200" b="0">
+                <a:solidFill>
+                  <a:srgbClr val="202b33"/>
+                </a:solidFill>
+                <a:latin typeface="Arial"/>
+                <a:ea typeface="Arial"/>
+                <a:cs typeface="Arial"/>
+              </a:rPr>
+              <a:t xml:space="preserve">&gt; "You're on 4.2. It's 43 days old. Update, or turn on auto-update."</a:t>
             </a:r>
             <a:endParaRPr lang="en-US" sz="1200"/>
           </a:p>
@@ -725,7 +771,7 @@
                 <a:ea typeface="Arial"/>
                 <a:cs typeface="Arial"/>
               </a:rPr>
-              <a:t xml:space="preserve">Can that person stop arrivals? Can they demand another test? Can they reject the change without missing a throughput target? Do they own the rollback and have time to understand it? Those are controls. Their name in the approval log is a record.</a:t>
+              <a:t xml:space="preserve">First prediction, labeled once as a prediction. Version becomes a first-class user-facing control, sitting in settings beside theme and language, because those two are already there for exactly this reason. They are preferences about how the software meets you.</a:t>
             </a:r>
             <a:endParaRPr lang="en-US" sz="1200"/>
           </a:p>
@@ -771,7 +817,7 @@
                 <a:ea typeface="Arial"/>
                 <a:cs typeface="Arial"/>
               </a:rPr>
-              <a:t xml:space="preserve">For the permissions change, name who accepts the behavior, who receives the incident, and who maintains the policy next year. Give each the context and authority their job requires. Accountability without those controls is just a convenient place to send the postmortem.</a:t>
+              <a:t xml:space="preserve">A returning user lands on the version she left. The banner reads: you are on 4.2, it is forty-three days old, here is what changed, update now or turn on auto-update. Change stops being something that happened to her while she was away and becomes something she asks for. That is the whole move.</a:t>
             </a:r>
             <a:endParaRPr lang="en-US" sz="1200"/>
           </a:p>
@@ -817,7 +863,53 @@
                 <a:ea typeface="Arial"/>
                 <a:cs typeface="Arial"/>
               </a:rPr>
-              <a:t xml:space="preserve">Source: Madeleine Clare Elish (2019), [Moral Crumple Zones: Cautionary Tales in Human-Robot Interaction](https://estsjournal.org/index.php/ests/article/download/260/177/), Engaging Science, Technology, and Society 5, 40–60.</a:t>
+              <a:t xml:space="preserve">The web spent twenty years removing this control and calling it a feature. Everyone runs current, nobody sits on an old build, support reasons about one thing. That was the right trade when shipping was expensive and rare. Ask whether it is still the right trade at forty-six deploys a quarter.</a:t>
+            </a:r>
+            <a:endParaRPr lang="en-US" sz="1200"/>
+          </a:p>
+          <a:p>
+            <a:pPr marL="0" indent="0">
+              <a:lnSpc>
+                <a:spcPts val="1560"/>
+              </a:lnSpc>
+              <a:spcAft>
+                <a:spcPts val="0"/>
+              </a:spcAft>
+              <a:buNone/>
+            </a:pPr>
+            <a:r>
+              <a:rPr lang="en-US" sz="1200" b="0">
+                <a:solidFill>
+                  <a:srgbClr val="202b33"/>
+                </a:solidFill>
+                <a:latin typeface="Arial"/>
+                <a:ea typeface="Arial"/>
+                <a:cs typeface="Arial"/>
+              </a:rPr>
+              <a:t xml:space="preserve"/>
+            </a:r>
+            <a:endParaRPr lang="en-US" sz="1200"/>
+          </a:p>
+          <a:p>
+            <a:pPr marL="0" indent="0">
+              <a:lnSpc>
+                <a:spcPts val="1560"/>
+              </a:lnSpc>
+              <a:spcAft>
+                <a:spcPts val="0"/>
+              </a:spcAft>
+              <a:buNone/>
+            </a:pPr>
+            <a:r>
+              <a:rPr lang="en-US" sz="1200" b="0">
+                <a:solidFill>
+                  <a:srgbClr val="202b33"/>
+                </a:solidFill>
+                <a:latin typeface="Arial"/>
+                <a:ea typeface="Arial"/>
+                <a:cs typeface="Arial"/>
+              </a:rPr>
+              <a:t xml:space="preserve">The picker also makes the cost visible to you. If a meaningful share of your users pin, you have measured the thing nobody measures. Their pin rate is your change-fatigue meter and it does not require a survey.</a:t>
             </a:r>
             <a:endParaRPr lang="en-US" sz="1200"/>
           </a:p>
@@ -930,7 +1022,7 @@
                 <a:ea typeface="Arial"/>
                 <a:cs typeface="Arial"/>
               </a:rPr>
-              <a:t xml:space="preserve">Essence and accident</a:t>
+              <a:t xml:space="preserve">What that costs to build</a:t>
             </a:r>
             <a:endParaRPr lang="en-US" sz="1200"/>
           </a:p>
@@ -976,7 +1068,7 @@
                 <a:ea typeface="Arial"/>
                 <a:cs typeface="Arial"/>
               </a:rPr>
-              <a:t xml:space="preserve">29:00 to 32:00 · build</a:t>
+              <a:t xml:space="preserve">29:30 to 32:00 · build</a:t>
             </a:r>
             <a:endParaRPr lang="en-US" sz="1200"/>
           </a:p>
@@ -1022,30 +1114,53 @@
                 <a:ea typeface="Arial"/>
                 <a:cs typeface="Arial"/>
               </a:rPr>
-              <a:t xml:space="preserve">&gt; Generating a branch is cheap</a:t>
-            </a:r>
-            <a:endParaRPr lang="en-US" sz="1200"/>
-          </a:p>
-          <a:p>
-            <a:pPr marL="0" indent="0">
-              <a:lnSpc>
-                <a:spcPts val="1560"/>
-              </a:lnSpc>
-              <a:spcAft>
-                <a:spcPts val="0"/>
-              </a:spcAft>
-              <a:buNone/>
-            </a:pPr>
-            <a:r>
-              <a:rPr lang="en-US" sz="1200" b="0">
-                <a:solidFill>
-                  <a:srgbClr val="202b33"/>
-                </a:solidFill>
-                <a:latin typeface="Arial"/>
-                <a:ea typeface="Arial"/>
-                <a:cs typeface="Arial"/>
-              </a:rPr>
-              <a:t xml:space="preserve">&gt; Choosing the permission boundary is still work</a:t>
+              <a:t xml:space="preserve">&gt; Versioned runtime + a sandbox per user</a:t>
+            </a:r>
+            <a:endParaRPr lang="en-US" sz="1200"/>
+          </a:p>
+          <a:p>
+            <a:pPr marL="0" indent="0">
+              <a:lnSpc>
+                <a:spcPts val="1560"/>
+              </a:lnSpc>
+              <a:spcAft>
+                <a:spcPts val="0"/>
+              </a:spcAft>
+              <a:buNone/>
+            </a:pPr>
+            <a:r>
+              <a:rPr lang="en-US" sz="1200" b="0">
+                <a:solidFill>
+                  <a:srgbClr val="202b33"/>
+                </a:solidFill>
+                <a:latin typeface="Arial"/>
+                <a:ea typeface="Arial"/>
+                <a:cs typeface="Arial"/>
+              </a:rPr>
+              <a:t xml:space="preserve">&gt; Privacy: better. Patching: worse.</a:t>
+            </a:r>
+            <a:endParaRPr lang="en-US" sz="1200"/>
+          </a:p>
+          <a:p>
+            <a:pPr marL="0" indent="0">
+              <a:lnSpc>
+                <a:spcPts val="1560"/>
+              </a:lnSpc>
+              <a:spcAft>
+                <a:spcPts val="0"/>
+              </a:spcAft>
+              <a:buNone/>
+            </a:pPr>
+            <a:r>
+              <a:rPr lang="en-US" sz="1200" b="0">
+                <a:solidFill>
+                  <a:srgbClr val="202b33"/>
+                </a:solidFill>
+                <a:latin typeface="Arial"/>
+                <a:ea typeface="Arial"/>
+                <a:cs typeface="Arial"/>
+              </a:rPr>
+              <a:t xml:space="preserve">&gt; Every live version is a live contract</a:t>
             </a:r>
             <a:endParaRPr lang="en-US" sz="1200"/>
           </a:p>
@@ -1091,7 +1206,7 @@
                 <a:ea typeface="Arial"/>
                 <a:cs typeface="Arial"/>
               </a:rPr>
-              <a:t xml:space="preserve">Brooks distinguished the essential conceptual work of software from the accidental difficulty of expressing it in a machine. His forecast expired in 1996. The distinction did not.</a:t>
+              <a:t xml:space="preserve">Now the engineering bill, because the prediction is easy and the architecture is not. Serving many live versions means a versioned runtime against a shared data model, or a data model versioned per user: a semi-persistent sandbox holding their build and their state, resumed on arrival and suspended after.</a:t>
             </a:r>
             <a:endParaRPr lang="en-US" sz="1200"/>
           </a:p>
@@ -1137,7 +1252,7 @@
                 <a:ea typeface="Arial"/>
                 <a:cs typeface="Arial"/>
               </a:rPr>
-              <a:t xml:space="preserve">The syntax of the role check is the easy part. Deciding what a tenant boundary means is the product and security decision. Faster code generation gives us more ways to express a decision we still have to make.</a:t>
+              <a:t xml:space="preserve">That buys something real on privacy. Data that never leaves a user's sandbox is data you cannot leak in bulk, and a breach costs you one tenant instead of one table. You are trading a class of problem you understand for one you do not: an unpatchable fleet you cannot force forward.</a:t>
             </a:r>
             <a:endParaRPr lang="en-US" sz="1200"/>
           </a:p>
@@ -1183,7 +1298,7 @@
                 <a:ea typeface="Arial"/>
                 <a:cs typeface="Arial"/>
               </a:rPr>
-              <a:t xml:space="preserve">So invest the saved time in the model of the problem. Who is the actor? Which state is authoritative? What happens after revocation? Those questions reduce the space of plausible wrong implementations before they reach the reviewer.</a:t>
+              <a:t xml:space="preserve">Every live version is also a live contract. Hyrum's law: with enough users, every observable behavior of your system gets depended on, including the ones you consider bugs. Choose how many versions you support on purpose, and give the number an expiry date.</a:t>
             </a:r>
             <a:endParaRPr lang="en-US" sz="1200"/>
           </a:p>
@@ -1229,7 +1344,7 @@
                 <a:ea typeface="Arial"/>
                 <a:cs typeface="Arial"/>
               </a:rPr>
-              <a:t xml:space="preserve">Source: Frederick P. Brooks Jr., [No Silver Bullet: Essence and Accidents of Software Engineering](https://www.cs.unc.edu/techreports/86-020.pdf), UNC technical report, 1986; published in Computer 20(4), 1987, 10–19.</a:t>
+              <a:t xml:space="preserve">Source: Hyrum Wright, [Hyrum's Law](https://www.hyrumslaw.com/). Stated as an observation about interface consumers, not a measured result.</a:t>
             </a:r>
             <a:endParaRPr lang="en-US" sz="1200"/>
           </a:p>
@@ -1342,7 +1457,7 @@
                 <a:ea typeface="Arial"/>
                 <a:cs typeface="Arial"/>
               </a:rPr>
-              <a:t xml:space="preserve">Three levers on the queue</a:t>
+              <a:t xml:space="preserve">Prediction: the app your neighbor configured</a:t>
             </a:r>
             <a:endParaRPr lang="en-US" sz="1200"/>
           </a:p>
@@ -1434,53 +1549,53 @@
                 <a:ea typeface="Arial"/>
                 <a:cs typeface="Arial"/>
               </a:rPr>
-              <a:t xml:space="preserve">&gt; Arrivals: decline work before generating it</a:t>
-            </a:r>
-            <a:endParaRPr lang="en-US" sz="1200"/>
-          </a:p>
-          <a:p>
-            <a:pPr marL="0" indent="0">
-              <a:lnSpc>
-                <a:spcPts val="1560"/>
-              </a:lnSpc>
-              <a:spcAft>
-                <a:spcPts val="0"/>
-              </a:spcAft>
-              <a:buNone/>
-            </a:pPr>
-            <a:r>
-              <a:rPr lang="en-US" sz="1200" b="0">
-                <a:solidFill>
-                  <a:srgbClr val="202b33"/>
-                </a:solidFill>
-                <a:latin typeface="Arial"/>
-                <a:ea typeface="Arial"/>
-                <a:cs typeface="Arial"/>
-              </a:rPr>
-              <a:t xml:space="preserve">&gt; Variance: bounded diffs and explicit behavior</a:t>
-            </a:r>
-            <a:endParaRPr lang="en-US" sz="1200"/>
-          </a:p>
-          <a:p>
-            <a:pPr marL="0" indent="0">
-              <a:lnSpc>
-                <a:spcPts val="1560"/>
-              </a:lnSpc>
-              <a:spcAft>
-                <a:spcPts val="0"/>
-              </a:spcAft>
-              <a:buNone/>
-            </a:pPr>
-            <a:r>
-              <a:rPr lang="en-US" sz="1200" b="0">
-                <a:solidFill>
-                  <a:srgbClr val="202b33"/>
-                </a:solidFill>
-                <a:latin typeface="Arial"/>
-                <a:ea typeface="Arial"/>
-                <a:cs typeface="Arial"/>
-              </a:rPr>
-              <a:t xml:space="preserve">&gt; Utilization: reserve actual review capacity</a:t>
+              <a:t xml:space="preserve">&gt; "Turn on what people like me have on"</a:t>
+            </a:r>
+            <a:endParaRPr lang="en-US" sz="1200"/>
+          </a:p>
+          <a:p>
+            <a:pPr marL="0" indent="0">
+              <a:lnSpc>
+                <a:spcPts val="1560"/>
+              </a:lnSpc>
+              <a:spcAft>
+                <a:spcPts val="0"/>
+              </a:spcAft>
+              <a:buNone/>
+            </a:pPr>
+            <a:r>
+              <a:rPr lang="en-US" sz="1200" b="0">
+                <a:solidFill>
+                  <a:srgbClr val="202b33"/>
+                </a:solidFill>
+                <a:latin typeface="Arial"/>
+                <a:ea typeface="Arial"/>
+                <a:cs typeface="Arial"/>
+              </a:rPr>
+              <a:t xml:space="preserve">&gt; Shareable configuration profiles</a:t>
+            </a:r>
+            <a:endParaRPr lang="en-US" sz="1200"/>
+          </a:p>
+          <a:p>
+            <a:pPr marL="0" indent="0">
+              <a:lnSpc>
+                <a:spcPts val="1560"/>
+              </a:lnSpc>
+              <a:spcAft>
+                <a:spcPts val="0"/>
+              </a:spcAft>
+              <a:buNone/>
+            </a:pPr>
+            <a:r>
+              <a:rPr lang="en-US" sz="1200" b="0">
+                <a:solidFill>
+                  <a:srgbClr val="202b33"/>
+                </a:solidFill>
+                <a:latin typeface="Arial"/>
+                <a:ea typeface="Arial"/>
+                <a:cs typeface="Arial"/>
+              </a:rPr>
+              <a:t xml:space="preserve">&gt; Developers have done this for thirty years</a:t>
             </a:r>
             <a:endParaRPr lang="en-US" sz="1200"/>
           </a:p>
@@ -1526,7 +1641,7 @@
                 <a:ea typeface="Arial"/>
                 <a:cs typeface="Arial"/>
               </a:rPr>
-              <a:t xml:space="preserve">Fewer arrivals means deciding which changes should exist, including declining a second implementation after the first already met the need. That is a rule about review load, not about generation: generate ten parallel attempts if you like, as long as a gate collapses them to one candidate before a human reads any of them. Judging the ten is Dynamic Scaling's talk, and its Council of Guards eats nine. This one protects the person who accepts the one that got through.</a:t>
+              <a:t xml:space="preserve">Second prediction. Feature flags stop being your deployment tool and become the user's preference surface. Not a wall of switches: a profile. Turn on what people who use this the way I do have turned on. Follow this person's setup. Adopt my team's.</a:t>
             </a:r>
             <a:endParaRPr lang="en-US" sz="1200"/>
           </a:p>
@@ -1572,7 +1687,7 @@
                 <a:ea typeface="Arial"/>
                 <a:cs typeface="Arial"/>
               </a:rPr>
-              <a:t xml:space="preserve">Smaller variance means reducing surprises at review. Keep one purpose per diff, include the behavioral cases, and separate mechanical changes from policy changes. Small in line count is useful only when it is also small in meaning.</a:t>
+              <a:t xml:space="preserve">This is not new, it is unevenly distributed. Dotfiles. VS Code extension packs. Home Assistant blueprints. Excel templates. Figma community files. Mod lists. Developers have been shipping configuration to each other as a social object for thirty years and we never offered it to anybody else.</a:t>
             </a:r>
             <a:endParaRPr lang="en-US" sz="1200"/>
           </a:p>
@@ -1618,7 +1733,53 @@
                 <a:ea typeface="Arial"/>
                 <a:cs typeface="Arial"/>
               </a:rPr>
-              <a:t xml:space="preserve">Protect slack by reserving review time and limiting work in progress. If the reviewer is on call, their calendar is not eight hours of service capacity. Measure interruptions before declaring them underutilized. Pilot these changes on one recurring workflow and keep the baseline.</a:t>
+              <a:t xml:space="preserve">Von Hippel's lead-user work found users at the leading edge of a market inventing what the rest will want, and his toolkit work in 2002 is about shipping them the means to do it. Rogers gives you the shape of who adopts first. A shared profile is a toolkit and a diffusion channel in the same object.</a:t>
+            </a:r>
+            <a:endParaRPr lang="en-US" sz="1200"/>
+          </a:p>
+          <a:p>
+            <a:pPr marL="0" indent="0">
+              <a:lnSpc>
+                <a:spcPts val="1560"/>
+              </a:lnSpc>
+              <a:spcAft>
+                <a:spcPts val="0"/>
+              </a:spcAft>
+              <a:buNone/>
+            </a:pPr>
+            <a:r>
+              <a:rPr lang="en-US" sz="1200" b="0">
+                <a:solidFill>
+                  <a:srgbClr val="202b33"/>
+                </a:solidFill>
+                <a:latin typeface="Arial"/>
+                <a:ea typeface="Arial"/>
+                <a:cs typeface="Arial"/>
+              </a:rPr>
+              <a:t xml:space="preserve"/>
+            </a:r>
+            <a:endParaRPr lang="en-US" sz="1200"/>
+          </a:p>
+          <a:p>
+            <a:pPr marL="0" indent="0">
+              <a:lnSpc>
+                <a:spcPts val="1560"/>
+              </a:lnSpc>
+              <a:spcAft>
+                <a:spcPts val="0"/>
+              </a:spcAft>
+              <a:buNone/>
+            </a:pPr>
+            <a:r>
+              <a:rPr lang="en-US" sz="1200" b="0">
+                <a:solidFill>
+                  <a:srgbClr val="202b33"/>
+                </a:solidFill>
+                <a:latin typeface="Arial"/>
+                <a:ea typeface="Arial"/>
+                <a:cs typeface="Arial"/>
+              </a:rPr>
+              <a:t xml:space="preserve">Source: Eric von Hippel (1986), [Lead Users: A Source of Novel Product Concepts](https://doi.org/10.1287/mnsc.32.7.791), Management Science 32(7), 791–805. Eric von Hippel and Ralph Katz (2002), [Shifting Innovation to Users via Toolkits](https://doi.org/10.1287/mnsc.48.7.821.2817), Management Science 48(7), 821–833. Everett M. Rogers (2003), Diffusion of Innovations, 5th edition, Free Press.</a:t>
             </a:r>
             <a:endParaRPr lang="en-US" sz="1200"/>
           </a:p>
@@ -1731,7 +1892,7 @@
                 <a:ea typeface="Arial"/>
                 <a:cs typeface="Arial"/>
               </a:rPr>
-              <a:t xml:space="preserve">Measure the wait, not the output</a:t>
+              <a:t xml:space="preserve">Everyone runs a different app now</a:t>
             </a:r>
             <a:endParaRPr lang="en-US" sz="1200"/>
           </a:p>
@@ -1777,7 +1938,7 @@
                 <a:ea typeface="Arial"/>
                 <a:cs typeface="Arial"/>
               </a:rPr>
-              <a:t xml:space="preserve">35:00 to 38:00 · land</a:t>
+              <a:t xml:space="preserve">35:00 to 38:00 · build</a:t>
             </a:r>
             <a:endParaRPr lang="en-US" sz="1200"/>
           </a:p>
@@ -1823,53 +1984,53 @@
                 <a:ea typeface="Arial"/>
                 <a:cs typeface="Arial"/>
               </a:rPr>
-              <a:t xml:space="preserve">&gt; Ready → first review → accepted</a:t>
-            </a:r>
-            <a:endParaRPr lang="en-US" sz="1200"/>
-          </a:p>
-          <a:p>
-            <a:pPr marL="0" indent="0">
-              <a:lnSpc>
-                <a:spcPts val="1560"/>
-              </a:lnSpc>
-              <a:spcAft>
-                <a:spcPts val="0"/>
-              </a:spcAft>
-              <a:buNone/>
-            </a:pPr>
-            <a:r>
-              <a:rPr lang="en-US" sz="1200" b="0">
-                <a:solidFill>
-                  <a:srgbClr val="202b33"/>
-                </a:solidFill>
-                <a:latin typeface="Arial"/>
-                <a:ea typeface="Arial"/>
-                <a:cs typeface="Arial"/>
-              </a:rPr>
-              <a:t xml:space="preserve">&gt; Hands-on review time ÷ available review time</a:t>
-            </a:r>
-            <a:endParaRPr lang="en-US" sz="1200"/>
-          </a:p>
-          <a:p>
-            <a:pPr marL="0" indent="0">
-              <a:lnSpc>
-                <a:spcPts val="1560"/>
-              </a:lnSpc>
-              <a:spcAft>
-                <a:spcPts val="0"/>
-              </a:spcAft>
-              <a:buNone/>
-            </a:pPr>
-            <a:r>
-              <a:rPr lang="en-US" sz="1200" b="0">
-                <a:solidFill>
-                  <a:srgbClr val="202b33"/>
-                </a:solidFill>
-                <a:latin typeface="Arial"/>
-                <a:ea typeface="Arial"/>
-                <a:cs typeface="Arial"/>
-              </a:rPr>
-              <a:t xml:space="preserve">&gt; Queue age and escaped defects beside throughput</a:t>
+              <a:t xml:space="preserve">&gt; Support: "which app do you have?"</a:t>
+            </a:r>
+            <a:endParaRPr lang="en-US" sz="1200"/>
+          </a:p>
+          <a:p>
+            <a:pPr marL="0" indent="0">
+              <a:lnSpc>
+                <a:spcPts val="1560"/>
+              </a:lnSpc>
+              <a:spcAft>
+                <a:spcPts val="0"/>
+              </a:spcAft>
+              <a:buNone/>
+            </a:pPr>
+            <a:r>
+              <a:rPr lang="en-US" sz="1200" b="0">
+                <a:solidFill>
+                  <a:srgbClr val="202b33"/>
+                </a:solidFill>
+                <a:latin typeface="Arial"/>
+                <a:ea typeface="Arial"/>
+                <a:cs typeface="Arial"/>
+              </a:rPr>
+              <a:t xml:space="preserve">&gt; Screenshots · A/B baselines · accessibility defaults</a:t>
+            </a:r>
+            <a:endParaRPr lang="en-US" sz="1200"/>
+          </a:p>
+          <a:p>
+            <a:pPr marL="0" indent="0">
+              <a:lnSpc>
+                <a:spcPts val="1560"/>
+              </a:lnSpc>
+              <a:spcAft>
+                <a:spcPts val="0"/>
+              </a:spcAft>
+              <a:buNone/>
+            </a:pPr>
+            <a:r>
+              <a:rPr lang="en-US" sz="1200" b="0">
+                <a:solidFill>
+                  <a:srgbClr val="202b33"/>
+                </a:solidFill>
+                <a:latin typeface="Arial"/>
+                <a:ea typeface="Arial"/>
+                <a:cs typeface="Arial"/>
+              </a:rPr>
+              <a:t xml:space="preserve">&gt; Same as it ever was: defaults still win</a:t>
             </a:r>
             <a:endParaRPr lang="en-US" sz="1200"/>
           </a:p>
@@ -1915,7 +2076,7 @@
                 <a:ea typeface="Arial"/>
                 <a:cs typeface="Arial"/>
               </a:rPr>
-              <a:t xml:space="preserve">Start with timestamps. When was the change ready, when did somebody first inspect it, and when was it accepted? Then sample hands-on review time separately. You need both the queue and the service time to explain a delay.</a:t>
+              <a:t xml:space="preserve">Support opens with a new first question: which app do you have. Your documentation screenshots are wrong for most readers. Your A/B test has no common baseline, because the control group configured itself. Accessibility defaults are the ones people turn off first and need most.</a:t>
             </a:r>
             <a:endParaRPr lang="en-US" sz="1200"/>
           </a:p>
@@ -1961,7 +2122,7 @@
                 <a:ea typeface="Arial"/>
                 <a:cs typeface="Arial"/>
               </a:rPr>
-              <a:t xml:space="preserve">Estimate review utilization against time actually available for review, after meetings and incident duty. Do not infer it from how many green squares somebody has on GitHub. Keep the estimate beside backlog age, rework, and escaped defects.</a:t>
+              <a:t xml:space="preserve">A user can also configure themselves into a corner and never meet the thing that would have helped. Call it a filter bubble for functionality rather than opinion.</a:t>
             </a:r>
             <a:endParaRPr lang="en-US" sz="1200"/>
           </a:p>
@@ -2007,7 +2168,7 @@
                 <a:ea typeface="Arial"/>
                 <a:cs typeface="Arial"/>
               </a:rPr>
-              <a:t xml:space="preserve">Take forty-five seconds. Estimate yours, or write down the missing measurement. The missing field is a better next action than another dashboard of generated lines.</a:t>
+              <a:t xml:space="preserve">Choice overload is the obvious objection and I will raise it myself: Iyengar and Lepper's jam study, 2000. A 2010 meta-analysis across fifty published experiments put the mean effect near zero. So I cite it and set it aside. The risk is not too many switches.</a:t>
             </a:r>
             <a:endParaRPr lang="en-US" sz="1200"/>
           </a:p>
@@ -2053,7 +2214,53 @@
                 <a:ea typeface="Arial"/>
                 <a:cs typeface="Arial"/>
               </a:rPr>
-              <a:t xml:space="preserve">Stage direction: Give 45 seconds. Invite one estimate and ask what counted as available time. Do not prescribe a universal utilization threshold.</a:t>
+              <a:t xml:space="preserve">It is that nobody is curating them. Somebody owns the default profile, somebody decides which shared setups get promoted, and somebody decides what a new user gets before they have a neighbor. Distribution still concentrates. Defaults still win.</a:t>
+            </a:r>
+            <a:endParaRPr lang="en-US" sz="1200"/>
+          </a:p>
+          <a:p>
+            <a:pPr marL="0" indent="0">
+              <a:lnSpc>
+                <a:spcPts val="1560"/>
+              </a:lnSpc>
+              <a:spcAft>
+                <a:spcPts val="0"/>
+              </a:spcAft>
+              <a:buNone/>
+            </a:pPr>
+            <a:r>
+              <a:rPr lang="en-US" sz="1200" b="0">
+                <a:solidFill>
+                  <a:srgbClr val="202b33"/>
+                </a:solidFill>
+                <a:latin typeface="Arial"/>
+                <a:ea typeface="Arial"/>
+                <a:cs typeface="Arial"/>
+              </a:rPr>
+              <a:t xml:space="preserve"/>
+            </a:r>
+            <a:endParaRPr lang="en-US" sz="1200"/>
+          </a:p>
+          <a:p>
+            <a:pPr marL="0" indent="0">
+              <a:lnSpc>
+                <a:spcPts val="1560"/>
+              </a:lnSpc>
+              <a:spcAft>
+                <a:spcPts val="0"/>
+              </a:spcAft>
+              <a:buNone/>
+            </a:pPr>
+            <a:r>
+              <a:rPr lang="en-US" sz="1200" b="0">
+                <a:solidFill>
+                  <a:srgbClr val="202b33"/>
+                </a:solidFill>
+                <a:latin typeface="Arial"/>
+                <a:ea typeface="Arial"/>
+                <a:cs typeface="Arial"/>
+              </a:rPr>
+              <a:t xml:space="preserve">Source: Sheena S. Iyengar and Mark R. Lepper (2000), [When Choice is Demotivating](https://doi.org/10.1037/0022-3514.79.6.995), Journal of Personality and Social Psychology 79(6), 995–1006. Benjamin Scheibehenne, Rainer Greifeneder and Peter M. Todd (2010), [Can There Ever Be Too Many Options?](https://doi.org/10.1086/651235), Journal of Consumer Research 37(3), 409–425. Cited to set aside.</a:t>
             </a:r>
             <a:endParaRPr lang="en-US" sz="1200"/>
           </a:p>
@@ -2166,7 +2373,7 @@
                 <a:ea typeface="Arial"/>
                 <a:cs typeface="Arial"/>
               </a:rPr>
-              <a:t xml:space="preserve">Knowing when to stop</a:t>
+              <a:t xml:space="preserve">Knowing what not to ship</a:t>
             </a:r>
             <a:endParaRPr lang="en-US" sz="1200"/>
           </a:p>
@@ -2258,7 +2465,30 @@
                 <a:ea typeface="Arial"/>
                 <a:cs typeface="Arial"/>
               </a:rPr>
-              <a:t xml:space="preserve">![Kingman: queue wait vs reviewer utilization, variability factor one](../../reveal-talks/assets/judgment/queue.svg)</a:t>
+              <a:t xml:space="preserve">&gt; Don't count what it cost you to build.</a:t>
+            </a:r>
+            <a:endParaRPr lang="en-US" sz="1200"/>
+          </a:p>
+          <a:p>
+            <a:pPr marL="0" indent="0">
+              <a:lnSpc>
+                <a:spcPts val="1560"/>
+              </a:lnSpc>
+              <a:spcAft>
+                <a:spcPts val="0"/>
+              </a:spcAft>
+              <a:buNone/>
+            </a:pPr>
+            <a:r>
+              <a:rPr lang="en-US" sz="1200" b="0">
+                <a:solidFill>
+                  <a:srgbClr val="202b33"/>
+                </a:solidFill>
+                <a:latin typeface="Arial"/>
+                <a:ea typeface="Arial"/>
+                <a:cs typeface="Arial"/>
+              </a:rPr>
+              <a:t xml:space="preserve">&gt; Count what it costs them to relearn.</a:t>
             </a:r>
             <a:endParaRPr lang="en-US" sz="1200"/>
           </a:p>
@@ -2304,30 +2534,7 @@
                 <a:ea typeface="Arial"/>
                 <a:cs typeface="Arial"/>
               </a:rPr>
-              <a:t xml:space="preserve">&gt; What should exist? Does it work?</a:t>
-            </a:r>
-            <a:endParaRPr lang="en-US" sz="1200"/>
-          </a:p>
-          <a:p>
-            <a:pPr marL="0" indent="0">
-              <a:lnSpc>
-                <a:spcPts val="1560"/>
-              </a:lnSpc>
-              <a:spcAft>
-                <a:spcPts val="0"/>
-              </a:spcAft>
-              <a:buNone/>
-            </a:pPr>
-            <a:r>
-              <a:rPr lang="en-US" sz="1200" b="0">
-                <a:solidFill>
-                  <a:srgbClr val="202b33"/>
-                </a:solidFill>
-                <a:latin typeface="Arial"/>
-                <a:ea typeface="Arial"/>
-                <a:cs typeface="Arial"/>
-              </a:rPr>
-              <a:t xml:space="preserve">&gt; Is it worth maintaining?</a:t>
+              <a:t xml:space="preserve">Back to the two tracks. Forty-six releases, four sessions. You did not get slower and she did not get dumber. You filled the space between her visits with work she has to do.</a:t>
             </a:r>
             <a:endParaRPr lang="en-US" sz="1200"/>
           </a:p>
@@ -2373,7 +2580,7 @@
                 <a:ea typeface="Arial"/>
                 <a:cs typeface="Arial"/>
               </a:rPr>
-              <a:t xml:space="preserve">Back to the curve. The reviewer did not get slower. We filled the space that let them absorb uneven work.</a:t>
+              <a:t xml:space="preserve">Turn the reasoning up as far as it goes. It will hand you a better-argued plan for a market it has never seen. The part it cannot do is the part you were hired for: knowing which of these your people will love, and knowing when they can stand to receive it.</a:t>
             </a:r>
             <a:endParaRPr lang="en-US" sz="1200"/>
           </a:p>
@@ -2419,7 +2626,7 @@
                 <a:ea typeface="Arial"/>
                 <a:cs typeface="Arial"/>
               </a:rPr>
-              <a:t xml:space="preserve">Ninety-five percent utilization is not efficiency. It is a nineteen-times wait with good posture. Argue with the model by measuring arrivals, service time, and variability. You cannot argue the queue away by pointing at how quickly the code appeared.</a:t>
+              <a:t xml:space="preserve">Sometimes the right release is a smaller one. Sometimes it is the same app they left.</a:t>
             </a:r>
             <a:endParaRPr lang="en-US" sz="1200"/>
           </a:p>
@@ -2465,53 +2672,7 @@
                 <a:ea typeface="Arial"/>
                 <a:cs typeface="Arial"/>
               </a:rPr>
-              <a:t xml:space="preserve">Sometimes the right result is a smaller change. Sometimes it is no change. Cheap code makes both decisions more valuable.</a:t>
-            </a:r>
-            <a:endParaRPr lang="en-US" sz="1200"/>
-          </a:p>
-          <a:p>
-            <a:pPr marL="0" indent="0">
-              <a:lnSpc>
-                <a:spcPts val="1560"/>
-              </a:lnSpc>
-              <a:spcAft>
-                <a:spcPts val="0"/>
-              </a:spcAft>
-              <a:buNone/>
-            </a:pPr>
-            <a:r>
-              <a:rPr lang="en-US" sz="1200" b="0">
-                <a:solidFill>
-                  <a:srgbClr val="202b33"/>
-                </a:solidFill>
-                <a:latin typeface="Arial"/>
-                <a:ea typeface="Arial"/>
-                <a:cs typeface="Arial"/>
-              </a:rPr>
-              <a:t xml:space="preserve"/>
-            </a:r>
-            <a:endParaRPr lang="en-US" sz="1200"/>
-          </a:p>
-          <a:p>
-            <a:pPr marL="0" indent="0">
-              <a:lnSpc>
-                <a:spcPts val="1560"/>
-              </a:lnSpc>
-              <a:spcAft>
-                <a:spcPts val="0"/>
-              </a:spcAft>
-              <a:buNone/>
-            </a:pPr>
-            <a:r>
-              <a:rPr lang="en-US" sz="1200" b="0">
-                <a:solidFill>
-                  <a:srgbClr val="202b33"/>
-                </a:solidFill>
-                <a:latin typeface="Arial"/>
-                <a:ea typeface="Arial"/>
-                <a:cs typeface="Arial"/>
-              </a:rPr>
-              <a:t xml:space="preserve">Stage direction: Leave the utilization curve up for questions.</a:t>
+              <a:t xml:space="preserve">Stage direction: Step back to slide 3 for the two tracks, then return here. Stop talking.</a:t>
             </a:r>
             <a:endParaRPr lang="en-US" sz="1200"/>
           </a:p>
@@ -2601,7 +2762,7 @@
                 <a:ea typeface="Arial"/>
                 <a:cs typeface="Arial"/>
               </a:rPr>
-              <a:t xml:space="preserve">Point at the queue</a:t>
+              <a:t xml:space="preserve">What got cheap, and what didn't</a:t>
             </a:r>
             <a:endParaRPr lang="en-US" sz="1200"/>
           </a:p>
@@ -2693,30 +2854,30 @@
                 <a:ea typeface="Arial"/>
                 <a:cs typeface="Arial"/>
               </a:rPr>
-              <a:t xml:space="preserve">&gt; Idea → specification → code → review → release</a:t>
-            </a:r>
-            <a:endParaRPr lang="en-US" sz="1200"/>
-          </a:p>
-          <a:p>
-            <a:pPr marL="0" indent="0">
-              <a:lnSpc>
-                <a:spcPts val="1560"/>
-              </a:lnSpc>
-              <a:spcAft>
-                <a:spcPts val="0"/>
-              </a:spcAft>
-              <a:buNone/>
-            </a:pPr>
-            <a:r>
-              <a:rPr lang="en-US" sz="1200" b="0">
-                <a:solidFill>
-                  <a:srgbClr val="202b33"/>
-                </a:solidFill>
-                <a:latin typeface="Arial"/>
-                <a:ea typeface="Arial"/>
-                <a:cs typeface="Arial"/>
-              </a:rPr>
-              <a:t xml:space="preserve">&gt; Not where it takes skill. Where it sits untouched.</a:t>
+              <a:t xml:space="preserve">&gt; Someone has to want it · build it · learn it</a:t>
+            </a:r>
+            <a:endParaRPr lang="en-US" sz="1200"/>
+          </a:p>
+          <a:p>
+            <a:pPr marL="0" indent="0">
+              <a:lnSpc>
+                <a:spcPts val="1560"/>
+              </a:lnSpc>
+              <a:spcAft>
+                <a:spcPts val="0"/>
+              </a:spcAft>
+              <a:buNone/>
+            </a:pPr>
+            <a:r>
+              <a:rPr lang="en-US" sz="1200" b="0">
+                <a:solidFill>
+                  <a:srgbClr val="202b33"/>
+                </a:solidFill>
+                <a:latin typeface="Arial"/>
+                <a:ea typeface="Arial"/>
+                <a:cs typeface="Arial"/>
+              </a:rPr>
+              <a:t xml:space="preserve">&gt; We only automated the middle one</a:t>
             </a:r>
             <a:endParaRPr lang="en-US" sz="1200"/>
           </a:p>
@@ -2762,7 +2923,7 @@
                 <a:ea typeface="Arial"/>
                 <a:cs typeface="Arial"/>
               </a:rPr>
-              <a:t xml:space="preserve">Where does your work wait? Not where does it take skill. Where does it sit untouched?</a:t>
+              <a:t xml:space="preserve">Three things used to gate a feature. Someone had to want it, someone had to build it, and someone had to learn it. We spent a decade attacking the middle one and this year we finished the job. The other two did not move.</a:t>
             </a:r>
             <a:endParaRPr lang="en-US" sz="1200"/>
           </a:p>
@@ -2808,7 +2969,7 @@
                 <a:ea typeface="Arial"/>
                 <a:cs typeface="Arial"/>
               </a:rPr>
-              <a:t xml:space="preserve">A team can have an implementation bottleneck on Monday and a review bottleneck on Friday. Faster generation changes the arrival rate at the next stage. If that stage was already close to capacity, the wait grows even when each review takes exactly as long as before.</a:t>
+              <a:t xml:space="preserve">Build cost is now close enough to zero that it stops being the selection mechanism, and that is the part nobody plans for. Scarcity was doing your prioritization for free. When the constraint dies, the decision it was quietly making lands on your desk, unlabeled.</a:t>
             </a:r>
             <a:endParaRPr lang="en-US" sz="1200"/>
           </a:p>
@@ -2854,53 +3015,7 @@
                 <a:ea typeface="Arial"/>
                 <a:cs typeface="Arial"/>
               </a:rPr>
-              <a:t xml:space="preserve">Draw a boundary around the review system. Count a change when it is ready for review and stop the clock when it leaves. Separate hands-on service time from waiting for somebody to start. Otherwise we will call a three-day wait a three-day review and optimize the wrong thing.</a:t>
-            </a:r>
-            <a:endParaRPr lang="en-US" sz="1200"/>
-          </a:p>
-          <a:p>
-            <a:pPr marL="0" indent="0">
-              <a:lnSpc>
-                <a:spcPts val="1560"/>
-              </a:lnSpc>
-              <a:spcAft>
-                <a:spcPts val="0"/>
-              </a:spcAft>
-              <a:buNone/>
-            </a:pPr>
-            <a:r>
-              <a:rPr lang="en-US" sz="1200" b="0">
-                <a:solidFill>
-                  <a:srgbClr val="202b33"/>
-                </a:solidFill>
-                <a:latin typeface="Arial"/>
-                <a:ea typeface="Arial"/>
-                <a:cs typeface="Arial"/>
-              </a:rPr>
-              <a:t xml:space="preserve"/>
-            </a:r>
-            <a:endParaRPr lang="en-US" sz="1200"/>
-          </a:p>
-          <a:p>
-            <a:pPr marL="0" indent="0">
-              <a:lnSpc>
-                <a:spcPts val="1560"/>
-              </a:lnSpc>
-              <a:spcAft>
-                <a:spcPts val="0"/>
-              </a:spcAft>
-              <a:buNone/>
-            </a:pPr>
-            <a:r>
-              <a:rPr lang="en-US" sz="1200" b="0">
-                <a:solidFill>
-                  <a:srgbClr val="202b33"/>
-                </a:solidFill>
-                <a:latin typeface="Arial"/>
-                <a:ea typeface="Arial"/>
-                <a:cs typeface="Arial"/>
-              </a:rPr>
-              <a:t xml:space="preserve">Stage direction: Budget 45 seconds for hands on each stage. Take one answer about where work waits and use it for the diagram.</a:t>
+              <a:t xml:space="preserve">So the interesting question stopped being what can we build. It is which of these should exist, who should see it, and when. Those are three separate decisions and most roadmaps answer only the first.</a:t>
             </a:r>
             <a:endParaRPr lang="en-US" sz="1200"/>
           </a:p>
@@ -3013,7 +3128,7 @@
                 <a:ea typeface="Arial"/>
                 <a:cs typeface="Arial"/>
               </a:rPr>
-              <a:t xml:space="preserve">A queue does not care how you feel about it</a:t>
+              <a:t xml:space="preserve">Nobody lives in your app</a:t>
             </a:r>
             <a:endParaRPr lang="en-US" sz="1200"/>
           </a:p>
@@ -3105,7 +3220,7 @@
                 <a:ea typeface="Arial"/>
                 <a:cs typeface="Arial"/>
               </a:rPr>
-              <a:t xml:space="preserve">![Kingman: queue wait vs reviewer utilization, variability factor one](../../reveal-talks/assets/judgment/queue.svg)</a:t>
+              <a:t xml:space="preserve">![Ninety days of releases against one user's four sessions](../../../../public/talks/assets/judgment/absorption.svg)</a:t>
             </a:r>
             <a:endParaRPr lang="en-US" sz="1200"/>
           </a:p>
@@ -3151,30 +3266,30 @@
                 <a:ea typeface="Arial"/>
                 <a:cs typeface="Arial"/>
               </a:rPr>
-              <a:t xml:space="preserve">&gt; Wq ≈ ((ca² + cs²) / 2) × ρ / (1 − ρ) × E[S]</a:t>
-            </a:r>
-            <a:endParaRPr lang="en-US" sz="1200"/>
-          </a:p>
-          <a:p>
-            <a:pPr marL="0" indent="0">
-              <a:lnSpc>
-                <a:spcPts val="1560"/>
-              </a:lnSpc>
-              <a:spcAft>
-                <a:spcPts val="0"/>
-              </a:spcAft>
-              <a:buNone/>
-            </a:pPr>
-            <a:r>
-              <a:rPr lang="en-US" sz="1200" b="0">
-                <a:solidFill>
-                  <a:srgbClr val="202b33"/>
-                </a:solidFill>
-                <a:latin typeface="Arial"/>
-                <a:ea typeface="Arial"/>
-                <a:cs typeface="Arial"/>
-              </a:rPr>
-              <a:t xml:space="preserve">&gt; V = 1: 80% → 4×; 90% → 9×; 95% → 19×</a:t>
+              <a:t xml:space="preserve">&gt; 90 days · 46 releases · 4 sessions</a:t>
+            </a:r>
+            <a:endParaRPr lang="en-US" sz="1200"/>
+          </a:p>
+          <a:p>
+            <a:pPr marL="0" indent="0">
+              <a:lnSpc>
+                <a:spcPts val="1560"/>
+              </a:lnSpc>
+              <a:spcAft>
+                <a:spcPts val="0"/>
+              </a:spcAft>
+              <a:buNone/>
+            </a:pPr>
+            <a:r>
+              <a:rPr lang="en-US" sz="1200" b="0">
+                <a:solidFill>
+                  <a:srgbClr val="202b33"/>
+                </a:solidFill>
+                <a:latin typeface="Arial"/>
+                <a:ea typeface="Arial"/>
+                <a:cs typeface="Arial"/>
+              </a:rPr>
+              <a:t xml:space="preserve">&gt; Between visits two and three: 21 changes, at once</a:t>
             </a:r>
             <a:endParaRPr lang="en-US" sz="1200"/>
           </a:p>
@@ -3220,7 +3335,7 @@
                 <a:ea typeface="Arial"/>
                 <a:cs typeface="Arial"/>
               </a:rPr>
-              <a:t xml:space="preserve">Kingman's single-server approximation separates three things: variability, utilization, and mean service time. Call the variability term V. Set V to one for this curve. At eighty percent utilization, point eight divided by point two is four. At ninety-five, point nine five divided by point zero five is nineteen.</a:t>
+              <a:t xml:space="preserve">Here is ninety days. The top track is your deploys: forty-six of them, roughly every other day, which any DORA-literate team would call healthy. The bottom track is one customer's sessions: four. Day three, day nineteen, day sixty-one, day eighty-eight.</a:t>
             </a:r>
             <a:endParaRPr lang="en-US" sz="1200"/>
           </a:p>
@@ -3266,7 +3381,7 @@
                 <a:ea typeface="Arial"/>
                 <a:cs typeface="Arial"/>
               </a:rPr>
-              <a:t xml:space="preserve">Fifteen percentage points of utilization bought nearly five times the wait. That is the price of the last bit of headroom. The multiplier is waiting time divided by hands-on review time. It does not include the review itself.</a:t>
+              <a:t xml:space="preserve">Between her second visit and her third you shipped twenty-one changes. She does not receive twenty-one changes. She receives one change, all at once, and it is enormous. Your release cadence and her absorption rate are different meters, and only one of them is on a dashboard.</a:t>
             </a:r>
             <a:endParaRPr lang="en-US" sz="1200"/>
           </a:p>
@@ -3312,7 +3427,7 @@
                 <a:ea typeface="Arial"/>
                 <a:cs typeface="Arial"/>
               </a:rPr>
-              <a:t xml:space="preserve">Little's law gives a separate accounting identity for a stable system: average work in progress equals throughput times average time in the system. They tell us what to measure before claiming the reviewer just needs to try harder.</a:t>
+              <a:t xml:space="preserve">DORA's four keys measure delivery capability: deployment frequency, lead time, change failure rate, time to restore. They are good measures of your pipeline. None of them describes what a returning user walks into. That measurement does not exist at most companies, and it is the one this talk is about.</a:t>
             </a:r>
             <a:endParaRPr lang="en-US" sz="1200"/>
           </a:p>
@@ -3358,7 +3473,7 @@
                 <a:ea typeface="Arial"/>
                 <a:cs typeface="Arial"/>
               </a:rPr>
-              <a:t xml:space="preserve">Stage direction: Trace the curve and do both divisions. Ask what happens if variability doubles; show that it multiplies the wait too.</a:t>
+              <a:t xml:space="preserve">Stage direction: Ask for a show of hands on median return interval before revealing the bottom track. Most rooms have never measured it; say so and move on.</a:t>
             </a:r>
             <a:endParaRPr lang="en-US" sz="1200"/>
           </a:p>
@@ -3404,7 +3519,7 @@
                 <a:ea typeface="Arial"/>
                 <a:cs typeface="Arial"/>
               </a:rPr>
-              <a:t xml:space="preserve">Source: J. F. C. Kingman (1961), [The single server queue in heavy traffic](https://www.cambridge.org/core/journals/mathematical-proceedings-of-the-cambridge-philosophical-society/article/abs/single-server-queue-in-heavy-traffic/81C55BC00A68FE6D5385638AA0B0AF37), 57(4), 902–904. John D. C. Little (1961), [A Proof for the Queuing Formula: L = λW](https://pubsonline.informs.org/doi/abs/10.1287/opre.9.3.383), Operations Research 9(3), 383–387.</a:t>
+              <a:t xml:space="preserve">Source: Nicole Forsgren, Jez Humble and Gene Kim (2018), [Accelerate: The Science of Lean Software and DevOps](https://itrevolution.com/product/accelerate/), IT Revolution. The four key metrics describe delivery performance, not user absorption; the tracks in this diagram are an illustration, not measured telemetry.</a:t>
             </a:r>
             <a:endParaRPr lang="en-US" sz="1200"/>
           </a:p>
@@ -3517,7 +3632,7 @@
                 <a:ea typeface="Arial"/>
                 <a:cs typeface="Arial"/>
               </a:rPr>
-              <a:t xml:space="preserve">The stage you didn't speed up</a:t>
+              <a:t xml:space="preserve">Feature fatigue is a measured effect</a:t>
             </a:r>
             <a:endParaRPr lang="en-US" sz="1200"/>
           </a:p>
@@ -3563,7 +3678,7 @@
                 <a:ea typeface="Arial"/>
                 <a:cs typeface="Arial"/>
               </a:rPr>
-              <a:t xml:space="preserve">08:00 to 10:30 · build</a:t>
+              <a:t xml:space="preserve">08:00 to 11:00 · build</a:t>
             </a:r>
             <a:endParaRPr lang="en-US" sz="1200"/>
           </a:p>
@@ -3609,30 +3724,53 @@
                 <a:ea typeface="Arial"/>
                 <a:cs typeface="Arial"/>
               </a:rPr>
-              <a:t xml:space="preserve">&gt; Fixed-work example: review is 30% of service time</a:t>
-            </a:r>
-            <a:endParaRPr lang="en-US" sz="1200"/>
-          </a:p>
-          <a:p>
-            <a:pPr marL="0" indent="0">
-              <a:lnSpc>
-                <a:spcPts val="1560"/>
-              </a:lnSpc>
-              <a:spcAft>
-                <a:spcPts val="0"/>
-              </a:spcAft>
-              <a:buNone/>
-            </a:pPr>
-            <a:r>
-              <a:rPr lang="en-US" sz="1200" b="0">
-                <a:solidFill>
-                  <a:srgbClr val="202b33"/>
-                </a:solidFill>
-                <a:latin typeface="Arial"/>
-                <a:ea typeface="Arial"/>
-                <a:cs typeface="Arial"/>
-              </a:rPr>
-              <a:t xml:space="preserve">&gt; Infinite generation speed → 1 / 0.30 = 3.33×</a:t>
+              <a:t xml:space="preserve">&gt; Before use: capability wins</a:t>
+            </a:r>
+            <a:endParaRPr lang="en-US" sz="1200"/>
+          </a:p>
+          <a:p>
+            <a:pPr marL="0" indent="0">
+              <a:lnSpc>
+                <a:spcPts val="1560"/>
+              </a:lnSpc>
+              <a:spcAft>
+                <a:spcPts val="0"/>
+              </a:spcAft>
+              <a:buNone/>
+            </a:pPr>
+            <a:r>
+              <a:rPr lang="en-US" sz="1200" b="0">
+                <a:solidFill>
+                  <a:srgbClr val="202b33"/>
+                </a:solidFill>
+                <a:latin typeface="Arial"/>
+                <a:ea typeface="Arial"/>
+                <a:cs typeface="Arial"/>
+              </a:rPr>
+              <a:t xml:space="preserve">&gt; After use: usability wins</a:t>
+            </a:r>
+            <a:endParaRPr lang="en-US" sz="1200"/>
+          </a:p>
+          <a:p>
+            <a:pPr marL="0" indent="0">
+              <a:lnSpc>
+                <a:spcPts val="1560"/>
+              </a:lnSpc>
+              <a:spcAft>
+                <a:spcPts val="0"/>
+              </a:spcAft>
+              <a:buNone/>
+            </a:pPr>
+            <a:r>
+              <a:rPr lang="en-US" sz="1200" b="0">
+                <a:solidFill>
+                  <a:srgbClr val="202b33"/>
+                </a:solidFill>
+                <a:latin typeface="Arial"/>
+                <a:ea typeface="Arial"/>
+                <a:cs typeface="Arial"/>
+              </a:rPr>
+              <a:t xml:space="preserve">&gt; Delighters decay into expectations</a:t>
             </a:r>
             <a:endParaRPr lang="en-US" sz="1200"/>
           </a:p>
@@ -3678,7 +3816,7 @@
                 <a:ea typeface="Arial"/>
                 <a:cs typeface="Arial"/>
               </a:rPr>
-              <a:t xml:space="preserve">Take a fixed job. Seventy percent of its service time is producing the implementation, thirty percent is review. Make generation instantaneous. Thirty percent remains. One divided by point three is three and a third. That is the ceiling for this example.</a:t>
+              <a:t xml:space="preserve">Thompson, Hamilton and Rust ran this in 2005 and named it feature fatigue. Before purchase, people prefer the product with more capabilities. After using it, satisfaction tracks usability instead. The same person picks the loaded one and then resents it.</a:t>
             </a:r>
             <a:endParaRPr lang="en-US" sz="1200"/>
           </a:p>
@@ -3724,7 +3862,7 @@
                 <a:ea typeface="Arial"/>
                 <a:cs typeface="Arial"/>
               </a:rPr>
-              <a:t xml:space="preserve">This is Amdahl's argument applied to a sequence of work. Put your own fraction in. Do not put queueing delay into the unchanged fraction and then pretend that delay stays fixed while arrivals change.</a:t>
+              <a:t xml:space="preserve">That is not a quirk, it is a structural problem. Your acquisition signal and your retention signal point in opposite directions, and the feature list is exactly where they diverge. Adding capability makes the sale and costs the renewal. Both effects are real and they arrive at different times, which is why no single dashboard shows you the trade.</a:t>
             </a:r>
             <a:endParaRPr lang="en-US" sz="1200"/>
           </a:p>
@@ -3770,7 +3908,7 @@
                 <a:ea typeface="Arial"/>
                 <a:cs typeface="Arial"/>
               </a:rPr>
-              <a:t xml:space="preserve">If you want more than that ceiling, change the remaining work. Specify the request better. Eliminate an unnecessary change. Reduce what a reviewer must reconstruct. Another speedup in generation does not remove the untouched stage.</a:t>
+              <a:t xml:space="preserve">Kano's model from 1984 splits attributes into must-be, one-dimensional and attractive. The attractive ones are the delighters, and Kano's own point is that they do not stay attractive. Today's delight is next year's baseline expectation, and the year after that its absence is a defect.</a:t>
             </a:r>
             <a:endParaRPr lang="en-US" sz="1200"/>
           </a:p>
@@ -3816,7 +3954,7 @@
                 <a:ea typeface="Arial"/>
                 <a:cs typeface="Arial"/>
               </a:rPr>
-              <a:t xml:space="preserve">Source: Gene M. Amdahl (1967), [Validity of the single processor approach to achieving large scale computing capabilities](https://doi.org/10.1145/1465482.1465560), AFIPS Spring Joint Computer Conference, 483–485.</a:t>
+              <a:t xml:space="preserve">Source: Debora Viana Thompson, Rebecca W. Hamilton and Roland T. Rust (2005), [Feature Fatigue: When Product Capabilities Become Too Much of a Good Thing](https://doi.org/10.1509/jmkr.2005.42.4.431), Journal of Marketing Research 42(4), 431–442. Noriaki Kano, Nobuhiko Seraku, Fumio Takahashi and Shinichi Tsuji (1984), Attractive Quality and Must-Be Quality, Journal of the Japanese Society for Quality Control 14(2), 39–48.</a:t>
             </a:r>
             <a:endParaRPr lang="en-US" sz="1200"/>
           </a:p>
@@ -3929,7 +4067,7 @@
                 <a:ea typeface="Arial"/>
                 <a:cs typeface="Arial"/>
               </a:rPr>
-              <a:t xml:space="preserve">You cannot inspect quality in</a:t>
+              <a:t xml:space="preserve">A change is a loss before it is a gain</a:t>
             </a:r>
             <a:endParaRPr lang="en-US" sz="1200"/>
           </a:p>
@@ -3975,7 +4113,7 @@
                 <a:ea typeface="Arial"/>
                 <a:cs typeface="Arial"/>
               </a:rPr>
-              <a:t xml:space="preserve">10:30 to 13:00 · build</a:t>
+              <a:t xml:space="preserve">11:00 to 13:30 · build</a:t>
             </a:r>
             <a:endParaRPr lang="en-US" sz="1200"/>
           </a:p>
@@ -4021,30 +4159,53 @@
                 <a:ea typeface="Arial"/>
                 <a:cs typeface="Arial"/>
               </a:rPr>
-              <a:t xml:space="preserve">&gt; Fewer arrivals. Smaller surprises.</a:t>
-            </a:r>
-            <a:endParaRPr lang="en-US" sz="1200"/>
-          </a:p>
-          <a:p>
-            <a:pPr marL="0" indent="0">
-              <a:lnSpc>
-                <a:spcPts val="1560"/>
-              </a:lnSpc>
-              <a:spcAft>
-                <a:spcPts val="0"/>
-              </a:spcAft>
-              <a:buNone/>
-            </a:pPr>
-            <a:r>
-              <a:rPr lang="en-US" sz="1200" b="0">
-                <a:solidFill>
-                  <a:srgbClr val="202b33"/>
-                </a:solidFill>
-                <a:latin typeface="Arial"/>
-                <a:ea typeface="Arial"/>
-                <a:cs typeface="Arial"/>
-              </a:rPr>
-              <a:t xml:space="preserve">&gt; Fix the process producing the queue.</a:t>
+              <a:t xml:space="preserve">&gt; Status quo bias · endowment effect</a:t>
+            </a:r>
+            <a:endParaRPr lang="en-US" sz="1200"/>
+          </a:p>
+          <a:p>
+            <a:pPr marL="0" indent="0">
+              <a:lnSpc>
+                <a:spcPts val="1560"/>
+              </a:lnSpc>
+              <a:spcAft>
+                <a:spcPts val="0"/>
+              </a:spcAft>
+              <a:buNone/>
+            </a:pPr>
+            <a:r>
+              <a:rPr lang="en-US" sz="1200" b="0">
+                <a:solidFill>
+                  <a:srgbClr val="202b33"/>
+                </a:solidFill>
+                <a:latin typeface="Arial"/>
+                <a:ea typeface="Arial"/>
+                <a:cs typeface="Arial"/>
+              </a:rPr>
+              <a:t xml:space="preserve">&gt; Recognition, not recall</a:t>
+            </a:r>
+            <a:endParaRPr lang="en-US" sz="1200"/>
+          </a:p>
+          <a:p>
+            <a:pPr marL="0" indent="0">
+              <a:lnSpc>
+                <a:spcPts val="1560"/>
+              </a:lnSpc>
+              <a:spcAft>
+                <a:spcPts val="0"/>
+              </a:spcAft>
+              <a:buNone/>
+            </a:pPr>
+            <a:r>
+              <a:rPr lang="en-US" sz="1200" b="0">
+                <a:solidFill>
+                  <a:srgbClr val="202b33"/>
+                </a:solidFill>
+                <a:latin typeface="Arial"/>
+                <a:ea typeface="Arial"/>
+                <a:cs typeface="Arial"/>
+              </a:rPr>
+              <a:t xml:space="preserve">&gt; The gain is yours. The loss is theirs, today.</a:t>
             </a:r>
             <a:endParaRPr lang="en-US" sz="1200"/>
           </a:p>
@@ -4090,7 +4251,7 @@
                 <a:ea typeface="Arial"/>
                 <a:cs typeface="Arial"/>
               </a:rPr>
-              <a:t xml:space="preserve">Deming's third point says to stop depending on inspection to achieve quality and build quality into the process. That is a useful objection to the default plan for generated code: produce more, then ask somebody to catch everything.</a:t>
+              <a:t xml:space="preserve">Samuelson and Zeckhauser named status quo bias in 1988: across lab and field decisions, people over-select the option they already hold. Kahneman, Knetsch and Thaler measured the endowment effect the same way — you want more for the mug once it is yours. Your user owns a workflow, and you are proposing to take it.</a:t>
             </a:r>
             <a:endParaRPr lang="en-US" sz="1200"/>
           </a:p>
@@ -4136,7 +4297,7 @@
                 <a:ea typeface="Arial"/>
                 <a:cs typeface="Arial"/>
               </a:rPr>
-              <a:t xml:space="preserve">Keep review. Change what it receives. An unasked-for abstraction, an unexplained permission change, and a speculative feature all consume the same person's attention. Rejecting them before generation is cheaper than having a reviewer reverse-engineer why they exist.</a:t>
+              <a:t xml:space="preserve">Nielsen's heuristic says recognition rather than recall. A returning user recognizes; she does not recall. Move the button and you have converted a recognition task into a recall task, against a memory that has been decaying since her last visit.</a:t>
             </a:r>
             <a:endParaRPr lang="en-US" sz="1200"/>
           </a:p>
@@ -4182,7 +4343,7 @@
                 <a:ea typeface="Arial"/>
                 <a:cs typeface="Arial"/>
               </a:rPr>
-              <a:t xml:space="preserve">Hiring can increase capacity. It is still worth fixing arrivals first. Otherwise the new reviewer inherits the same variance, interruptions, and missing context, with a longer onboarding document.</a:t>
+              <a:t xml:space="preserve">The gain from a redesign is real, and it arrives later, spread thin. The loss is small, specific and arrives on first login. Individually every change was an improvement. In aggregate, at your cadence, it reads as instability.</a:t>
             </a:r>
             <a:endParaRPr lang="en-US" sz="1200"/>
           </a:p>
@@ -4228,7 +4389,7 @@
                 <a:ea typeface="Arial"/>
                 <a:cs typeface="Arial"/>
               </a:rPr>
-              <a:t xml:space="preserve">Source: W. Edwards Deming (1986), Out of the Crisis, MIT Center for Advanced Engineering Study; Point 3 of the Fourteen Points. Applied to review by the [Deming Institute](https://deming.org/software-code-reviews-from-a-deming-perspective/).</a:t>
+              <a:t xml:space="preserve">Source: William Samuelson and Richard Zeckhauser (1988), [Status Quo Bias in Decision Making](https://doi.org/10.1007/BF00055564), Journal of Risk and Uncertainty 1(1), 7–59. Daniel Kahneman, Jack L. Knetsch and Richard H. Thaler (1990), [Experimental Tests of the Endowment Effect and the Coase Theorem](https://doi.org/10.1086/261737), Journal of Political Economy 98(6), 1325–1348. Jakob Nielsen (1994), [Ten Usability Heuristics for User Interface Design](https://www.nngroup.com/articles/ten-usability-heuristics/).</a:t>
             </a:r>
             <a:endParaRPr lang="en-US" sz="1200"/>
           </a:p>
@@ -4341,7 +4502,7 @@
                 <a:ea typeface="Arial"/>
                 <a:cs typeface="Arial"/>
               </a:rPr>
-              <a:t xml:space="preserve">"Add enterprise permissions"</a:t>
+              <a:t xml:space="preserve">"Ship it Tuesday"</a:t>
             </a:r>
             <a:endParaRPr lang="en-US" sz="1200"/>
           </a:p>
@@ -4387,7 +4548,7 @@
                 <a:ea typeface="Arial"/>
                 <a:cs typeface="Arial"/>
               </a:rPr>
-              <a:t xml:space="preserve">13:00 to 16:00 · build</a:t>
+              <a:t xml:space="preserve">13:30 to 16:30 · build</a:t>
             </a:r>
             <a:endParaRPr lang="en-US" sz="1200"/>
           </a:p>
@@ -4433,53 +4594,30 @@
                 <a:ea typeface="Arial"/>
                 <a:cs typeface="Arial"/>
               </a:rPr>
-              <a:t xml:space="preserve">&gt; Who can do what, in which tenant?</a:t>
-            </a:r>
-            <a:endParaRPr lang="en-US" sz="1200"/>
-          </a:p>
-          <a:p>
-            <a:pPr marL="0" indent="0">
-              <a:lnSpc>
-                <a:spcPts val="1560"/>
-              </a:lnSpc>
-              <a:spcAft>
-                <a:spcPts val="0"/>
-              </a:spcAft>
-              <a:buNone/>
-            </a:pPr>
-            <a:r>
-              <a:rPr lang="en-US" sz="1200" b="0">
-                <a:solidFill>
-                  <a:srgbClr val="202b33"/>
-                </a:solidFill>
-                <a:latin typeface="Arial"/>
-                <a:ea typeface="Arial"/>
-                <a:cs typeface="Arial"/>
-              </a:rPr>
-              <a:t xml:space="preserve">&gt; What happens when access changes?</a:t>
-            </a:r>
-            <a:endParaRPr lang="en-US" sz="1200"/>
-          </a:p>
-          <a:p>
-            <a:pPr marL="0" indent="0">
-              <a:lnSpc>
-                <a:spcPts val="1560"/>
-              </a:lnSpc>
-              <a:spcAft>
-                <a:spcPts val="0"/>
-              </a:spcAft>
-              <a:buNone/>
-            </a:pPr>
-            <a:r>
-              <a:rPr lang="en-US" sz="1200" b="0">
-                <a:solidFill>
-                  <a:srgbClr val="202b33"/>
-                </a:solidFill>
-                <a:latin typeface="Arial"/>
-                <a:ea typeface="Arial"/>
-                <a:cs typeface="Arial"/>
-              </a:rPr>
-              <a:t xml:space="preserve">&gt; What must never happen?</a:t>
+              <a:t xml:space="preserve">&gt; "Ship it Tuesday."</a:t>
+            </a:r>
+            <a:endParaRPr lang="en-US" sz="1200"/>
+          </a:p>
+          <a:p>
+            <a:pPr marL="0" indent="0">
+              <a:lnSpc>
+                <a:spcPts val="1560"/>
+              </a:lnSpc>
+              <a:spcAft>
+                <a:spcPts val="0"/>
+              </a:spcAft>
+              <a:buNone/>
+            </a:pPr>
+            <a:r>
+              <a:rPr lang="en-US" sz="1200" b="0">
+                <a:solidFill>
+                  <a:srgbClr val="202b33"/>
+                </a:solidFill>
+                <a:latin typeface="Arial"/>
+                <a:ea typeface="Arial"/>
+                <a:cs typeface="Arial"/>
+              </a:rPr>
+              <a:t xml:space="preserve">&gt; That is the whole request.</a:t>
             </a:r>
             <a:endParaRPr lang="en-US" sz="1200"/>
           </a:p>
@@ -4525,7 +4663,7 @@
                 <a:ea typeface="Arial"/>
                 <a:cs typeface="Arial"/>
               </a:rPr>
-              <a:t xml:space="preserve">Add enterprise permissions. That is the entire request.</a:t>
+              <a:t xml:space="preserve">Ship it Tuesday. That is the entire request, somebody senior said it, and everyone in the room nodded.</a:t>
             </a:r>
             <a:endParaRPr lang="en-US" sz="1200"/>
           </a:p>
@@ -4571,7 +4709,7 @@
                 <a:ea typeface="Arial"/>
                 <a:cs typeface="Arial"/>
               </a:rPr>
-              <a:t xml:space="preserve">Spend sixty seconds with the person next to you. Write the questions you need answered before implementing it. You do not get a second page of requirements; that is the point.</a:t>
+              <a:t xml:space="preserve">Sixty seconds with the person next to you. Write down what else has to be true for Tuesday to be the right answer. You do not get a second page of context; that is the point.</a:t>
             </a:r>
             <a:endParaRPr lang="en-US" sz="1200"/>
           </a:p>
@@ -4617,7 +4755,7 @@
                 <a:ea typeface="Arial"/>
                 <a:cs typeface="Arial"/>
               </a:rPr>
-              <a:t xml:space="preserve">Who can grant a role? Does it apply to one tenant or every tenant? What happens to an existing session after revocation? What does the audit record need to show? There are several plausible implementations, and most disagree about behavior the ticket never specified.</a:t>
+              <a:t xml:space="preserve">Which customers get it Tuesday? Do they get it with the other three things in the branch, or on its own? Who is on support Tuesday afternoon? Has anyone told the people who write the docs, the people who trained the account team, or the customer whose renewal is Thursday? Is Tuesday reversible?</a:t>
             </a:r>
             <a:endParaRPr lang="en-US" sz="1200"/>
           </a:p>
@@ -4663,7 +4801,7 @@
                 <a:ea typeface="Arial"/>
                 <a:cs typeface="Arial"/>
               </a:rPr>
-              <a:t xml:space="preserve">We made code cheap and left the question expensive. Writing down the answer is part of implementation. It just happens before the diff.</a:t>
+              <a:t xml:space="preserve">None of those are engineering questions and all of them are release questions. We made building free and left the sequencing expensive.</a:t>
             </a:r>
             <a:endParaRPr lang="en-US" sz="1200"/>
           </a:p>
@@ -4709,7 +4847,7 @@
                 <a:ea typeface="Arial"/>
                 <a:cs typeface="Arial"/>
               </a:rPr>
-              <a:t xml:space="preserve">Stage direction: Read the request once. Give pairs sixty seconds here, thirty in the 15-minute cut. Collect two answers, then introduce the tenant and revocation questions.</a:t>
+              <a:t xml:space="preserve">Stage direction: Read the request once, exactly as written. Give pairs sixty seconds here, thirty in the 15-minute cut. Collect two answers, then add the renewal date and the support roster yourself.</a:t>
             </a:r>
             <a:endParaRPr lang="en-US" sz="1200"/>
           </a:p>
@@ -4822,7 +4960,7 @@
                 <a:ea typeface="Arial"/>
                 <a:cs typeface="Arial"/>
               </a:rPr>
-              <a:t xml:space="preserve">A spec reduces variance</a:t>
+              <a:t xml:space="preserve">Five axes, one of them a date</a:t>
             </a:r>
             <a:endParaRPr lang="en-US" sz="1200"/>
           </a:p>
@@ -4868,7 +5006,7 @@
                 <a:ea typeface="Arial"/>
                 <a:cs typeface="Arial"/>
               </a:rPr>
-              <a:t xml:space="preserve">16:00 to 19:00 · build</a:t>
+              <a:t xml:space="preserve">16:30 to 19:30 · build</a:t>
             </a:r>
             <a:endParaRPr lang="en-US" sz="1200"/>
           </a:p>
@@ -4914,53 +5052,30 @@
                 <a:ea typeface="Arial"/>
                 <a:cs typeface="Arial"/>
               </a:rPr>
-              <a:t xml:space="preserve">&gt; Actor + tenant + action + resource</a:t>
-            </a:r>
-            <a:endParaRPr lang="en-US" sz="1200"/>
-          </a:p>
-          <a:p>
-            <a:pPr marL="0" indent="0">
-              <a:lnSpc>
-                <a:spcPts val="1560"/>
-              </a:lnSpc>
-              <a:spcAft>
-                <a:spcPts val="0"/>
-              </a:spcAft>
-              <a:buNone/>
-            </a:pPr>
-            <a:r>
-              <a:rPr lang="en-US" sz="1200" b="0">
-                <a:solidFill>
-                  <a:srgbClr val="202b33"/>
-                </a:solidFill>
-                <a:latin typeface="Arial"/>
-                <a:ea typeface="Arial"/>
-                <a:cs typeface="Arial"/>
-              </a:rPr>
-              <a:t xml:space="preserve">&gt; Revocation changes the next decision</a:t>
-            </a:r>
-            <a:endParaRPr lang="en-US" sz="1200"/>
-          </a:p>
-          <a:p>
-            <a:pPr marL="0" indent="0">
-              <a:lnSpc>
-                <a:spcPts val="1560"/>
-              </a:lnSpc>
-              <a:spcAft>
-                <a:spcPts val="0"/>
-              </a:spcAft>
-              <a:buNone/>
-            </a:pPr>
-            <a:r>
-              <a:rPr lang="en-US" sz="1200" b="0">
-                <a:solidFill>
-                  <a:srgbClr val="202b33"/>
-                </a:solidFill>
-                <a:latin typeface="Arial"/>
-                <a:ea typeface="Arial"/>
-                <a:cs typeface="Arial"/>
-              </a:rPr>
-              <a:t xml:space="preserve">&gt; Denied actions leave state unchanged</a:t>
+              <a:t xml:space="preserve">&gt; What · who · when · shape · reversibility</a:t>
+            </a:r>
+            <a:endParaRPr lang="en-US" sz="1200"/>
+          </a:p>
+          <a:p>
+            <a:pPr marL="0" indent="0">
+              <a:lnSpc>
+                <a:spcPts val="1560"/>
+              </a:lnSpc>
+              <a:spcAft>
+                <a:spcPts val="0"/>
+              </a:spcAft>
+              <a:buNone/>
+            </a:pPr>
+            <a:r>
+              <a:rPr lang="en-US" sz="1200" b="0">
+                <a:solidFill>
+                  <a:srgbClr val="202b33"/>
+                </a:solidFill>
+                <a:latin typeface="Arial"/>
+                <a:ea typeface="Arial"/>
+                <a:cs typeface="Arial"/>
+              </a:rPr>
+              <a:t xml:space="preserve">&gt; Every axis commits somebody who is not in this room</a:t>
             </a:r>
             <a:endParaRPr lang="en-US" sz="1200"/>
           </a:p>
@@ -5006,7 +5121,145 @@
                 <a:ea typeface="Arial"/>
                 <a:cs typeface="Arial"/>
               </a:rPr>
-              <a:t xml:space="preserve">For this example, an administrator can grant a role only inside the tenant they administer. A revoked role cannot authorize the next operation. A denied change leaves protected state untouched and records the failed attempt.</a:t>
+              <a:t xml:space="preserve">| Axis | Question | Commits |</a:t>
+            </a:r>
+            <a:endParaRPr lang="en-US" sz="1200"/>
+          </a:p>
+          <a:p>
+            <a:pPr marL="0" indent="0">
+              <a:lnSpc>
+                <a:spcPts val="1560"/>
+              </a:lnSpc>
+              <a:spcAft>
+                <a:spcPts val="0"/>
+              </a:spcAft>
+              <a:buNone/>
+            </a:pPr>
+            <a:r>
+              <a:rPr lang="en-US" sz="1200" b="0">
+                <a:solidFill>
+                  <a:srgbClr val="202b33"/>
+                </a:solidFill>
+                <a:latin typeface="Arial"/>
+                <a:ea typeface="Arial"/>
+                <a:cs typeface="Arial"/>
+              </a:rPr>
+              <a:t xml:space="preserve">| --- | --- | --- |</a:t>
+            </a:r>
+            <a:endParaRPr lang="en-US" sz="1200"/>
+          </a:p>
+          <a:p>
+            <a:pPr marL="0" indent="0">
+              <a:lnSpc>
+                <a:spcPts val="1560"/>
+              </a:lnSpc>
+              <a:spcAft>
+                <a:spcPts val="0"/>
+              </a:spcAft>
+              <a:buNone/>
+            </a:pPr>
+            <a:r>
+              <a:rPr lang="en-US" sz="1200" b="0">
+                <a:solidFill>
+                  <a:srgbClr val="202b33"/>
+                </a:solidFill>
+                <a:latin typeface="Arial"/>
+                <a:ea typeface="Arial"/>
+                <a:cs typeface="Arial"/>
+              </a:rPr>
+              <a:t xml:space="preserve">| What | Should it exist at all? | Docs, support surface |</a:t>
+            </a:r>
+            <a:endParaRPr lang="en-US" sz="1200"/>
+          </a:p>
+          <a:p>
+            <a:pPr marL="0" indent="0">
+              <a:lnSpc>
+                <a:spcPts val="1560"/>
+              </a:lnSpc>
+              <a:spcAft>
+                <a:spcPts val="0"/>
+              </a:spcAft>
+              <a:buNone/>
+            </a:pPr>
+            <a:r>
+              <a:rPr lang="en-US" sz="1200" b="0">
+                <a:solidFill>
+                  <a:srgbClr val="202b33"/>
+                </a:solidFill>
+                <a:latin typeface="Arial"/>
+                <a:ea typeface="Arial"/>
+                <a:cs typeface="Arial"/>
+              </a:rPr>
+              <a:t xml:space="preserve">| Who | Everyone, or a cohort? | Sales, contracts |</a:t>
+            </a:r>
+            <a:endParaRPr lang="en-US" sz="1200"/>
+          </a:p>
+          <a:p>
+            <a:pPr marL="0" indent="0">
+              <a:lnSpc>
+                <a:spcPts val="1560"/>
+              </a:lnSpc>
+              <a:spcAft>
+                <a:spcPts val="0"/>
+              </a:spcAft>
+              <a:buNone/>
+            </a:pPr>
+            <a:r>
+              <a:rPr lang="en-US" sz="1200" b="0">
+                <a:solidFill>
+                  <a:srgbClr val="202b33"/>
+                </a:solidFill>
+                <a:latin typeface="Arial"/>
+                <a:ea typeface="Arial"/>
+                <a:cs typeface="Arial"/>
+              </a:rPr>
+              <a:t xml:space="preserve">| When | Tuesday, or next quarter? | Marketing, renewals |</a:t>
+            </a:r>
+            <a:endParaRPr lang="en-US" sz="1200"/>
+          </a:p>
+          <a:p>
+            <a:pPr marL="0" indent="0">
+              <a:lnSpc>
+                <a:spcPts val="1560"/>
+              </a:lnSpc>
+              <a:spcAft>
+                <a:spcPts val="0"/>
+              </a:spcAft>
+              <a:buNone/>
+            </a:pPr>
+            <a:r>
+              <a:rPr lang="en-US" sz="1200" b="0">
+                <a:solidFill>
+                  <a:srgbClr val="202b33"/>
+                </a:solidFill>
+                <a:latin typeface="Arial"/>
+                <a:ea typeface="Arial"/>
+                <a:cs typeface="Arial"/>
+              </a:rPr>
+              <a:t xml:space="preserve">| Shape | One batch or rolling? | Rollback, triage |</a:t>
+            </a:r>
+            <a:endParaRPr lang="en-US" sz="1200"/>
+          </a:p>
+          <a:p>
+            <a:pPr marL="0" indent="0">
+              <a:lnSpc>
+                <a:spcPts val="1560"/>
+              </a:lnSpc>
+              <a:spcAft>
+                <a:spcPts val="0"/>
+              </a:spcAft>
+              <a:buNone/>
+            </a:pPr>
+            <a:r>
+              <a:rPr lang="en-US" sz="1200" b="0">
+                <a:solidFill>
+                  <a:srgbClr val="202b33"/>
+                </a:solidFill>
+                <a:latin typeface="Arial"/>
+                <a:ea typeface="Arial"/>
+                <a:cs typeface="Arial"/>
+              </a:rPr>
+              <a:t xml:space="preserve">| Reversible | Flag, migration, one-way? | On-call, data model |</a:t>
             </a:r>
             <a:endParaRPr lang="en-US" sz="1200"/>
           </a:p>
@@ -5052,7 +5305,7 @@
                 <a:ea typeface="Arial"/>
                 <a:cs typeface="Arial"/>
               </a:rPr>
-              <a:t xml:space="preserve">Those statements produce cases. An admin in tenant A requests a change in A: allow. The same admin requests a change in B: deny. Revoke the role, repeat the A request: deny. Check the resulting state, not just the status message.</a:t>
+              <a:t xml:space="preserve">Five axes, not one. Most roadmap tools model exactly one of them, the date, which is why the date is the only one that ever gets argued about.</a:t>
             </a:r>
             <a:endParaRPr lang="en-US" sz="1200"/>
           </a:p>
@@ -5098,7 +5351,7 @@
                 <a:ea typeface="Arial"/>
                 <a:cs typeface="Arial"/>
               </a:rPr>
-              <a:t xml:space="preserve">Tie this back to the curve. Clear boundaries reduce the number of interpretations arriving at review. Bounded diffs reduce the amount of code a reviewer has to reconstruct at once. That is the variance term. On purpose.</a:t>
+              <a:t xml:space="preserve">Read the right-hand column. Every one of these commits a person who is not in this room: support staffing, a documentation rewrite, an account executive who already promised it, a renewal conversation on Thursday. Marketing wants a date it can build a campaign against, and a campaign is a promise you cannot flag off.</a:t>
             </a:r>
             <a:endParaRPr lang="en-US" sz="1200"/>
           </a:p>
@@ -5144,7 +5397,53 @@
                 <a:ea typeface="Arial"/>
                 <a:cs typeface="Arial"/>
               </a:rPr>
-              <a:t xml:space="preserve">Stage direction: Write the three cases beside the request. Keep the cross-tenant case visible in the handout, not beside the later demo’s initial code.</a:t>
+              <a:t xml:space="preserve">You also have to keep all of it flexible, because a competitor ships something on a Wednesday and now you want to pull a feature forward. Pulling it forward is not free. It costs you the sequence, and the sequence was the part you had actually reasoned about.</a:t>
+            </a:r>
+            <a:endParaRPr lang="en-US" sz="1200"/>
+          </a:p>
+          <a:p>
+            <a:pPr marL="0" indent="0">
+              <a:lnSpc>
+                <a:spcPts val="1560"/>
+              </a:lnSpc>
+              <a:spcAft>
+                <a:spcPts val="0"/>
+              </a:spcAft>
+              <a:buNone/>
+            </a:pPr>
+            <a:r>
+              <a:rPr lang="en-US" sz="1200" b="0">
+                <a:solidFill>
+                  <a:srgbClr val="202b33"/>
+                </a:solidFill>
+                <a:latin typeface="Arial"/>
+                <a:ea typeface="Arial"/>
+                <a:cs typeface="Arial"/>
+              </a:rPr>
+              <a:t xml:space="preserve"/>
+            </a:r>
+            <a:endParaRPr lang="en-US" sz="1200"/>
+          </a:p>
+          <a:p>
+            <a:pPr marL="0" indent="0">
+              <a:lnSpc>
+                <a:spcPts val="1560"/>
+              </a:lnSpc>
+              <a:spcAft>
+                <a:spcPts val="0"/>
+              </a:spcAft>
+              <a:buNone/>
+            </a:pPr>
+            <a:r>
+              <a:rPr lang="en-US" sz="1200" b="0">
+                <a:solidFill>
+                  <a:srgbClr val="202b33"/>
+                </a:solidFill>
+                <a:latin typeface="Arial"/>
+                <a:ea typeface="Arial"/>
+                <a:cs typeface="Arial"/>
+              </a:rPr>
+              <a:t xml:space="preserve">Story: The release you pulled forward to answer a competitor. Bring what slipped, what support absorbed, and whether it worked.</a:t>
             </a:r>
             <a:endParaRPr lang="en-US" sz="1200"/>
           </a:p>
@@ -5257,7 +5556,7 @@
                 <a:ea typeface="Arial"/>
                 <a:cs typeface="Arial"/>
               </a:rPr>
-              <a:t xml:space="preserve">What review actually catches</a:t>
+              <a:t xml:space="preserve">Turn the tokens up</a:t>
             </a:r>
             <a:endParaRPr lang="en-US" sz="1200"/>
           </a:p>
@@ -5303,7 +5602,7 @@
                 <a:ea typeface="Arial"/>
                 <a:cs typeface="Arial"/>
               </a:rPr>
-              <a:t xml:space="preserve">19:00 to 22:00 · build</a:t>
+              <a:t xml:space="preserve">19:30 to 23:30 · peak</a:t>
             </a:r>
             <a:endParaRPr lang="en-US" sz="1200"/>
           </a:p>
@@ -5349,30 +5648,53 @@
                 <a:ea typeface="Arial"/>
                 <a:cs typeface="Arial"/>
               </a:rPr>
-              <a:t xml:space="preserve">&gt; Understanding is work</a:t>
-            </a:r>
-            <a:endParaRPr lang="en-US" sz="1200"/>
-          </a:p>
-          <a:p>
-            <a:pPr marL="0" indent="0">
-              <a:lnSpc>
-                <a:spcPts val="1560"/>
-              </a:lnSpc>
-              <a:spcAft>
-                <a:spcPts val="0"/>
-              </a:spcAft>
-              <a:buNone/>
-            </a:pPr>
-            <a:r>
-              <a:rPr lang="en-US" sz="1200" b="0">
-                <a:solidFill>
-                  <a:srgbClr val="202b33"/>
-                </a:solidFill>
-                <a:latin typeface="Arial"/>
-                <a:ea typeface="Arial"/>
-                <a:cs typeface="Arial"/>
-              </a:rPr>
-              <a:t xml:space="preserve">&gt; Defect finding · knowledge transfer · alternative designs</a:t>
+              <a:t xml:space="preserve">&gt; 6 features · 3 cohorts → 524,880 plans</a:t>
+            </a:r>
+            <a:endParaRPr lang="en-US" sz="1200"/>
+          </a:p>
+          <a:p>
+            <a:pPr marL="0" indent="0">
+              <a:lnSpc>
+                <a:spcPts val="1560"/>
+              </a:lnSpc>
+              <a:spcAft>
+                <a:spcPts val="0"/>
+              </a:spcAft>
+              <a:buNone/>
+            </a:pPr>
+            <a:r>
+              <a:rPr lang="en-US" sz="1200" b="0">
+                <a:solidFill>
+                  <a:srgbClr val="202b33"/>
+                </a:solidFill>
+                <a:latin typeface="Arial"/>
+                <a:ea typeface="Arial"/>
+                <a:cs typeface="Arial"/>
+              </a:rPr>
+              <a:t xml:space="preserve">&gt; 12,000 weekly actives · 4 weeks → 16 arms</a:t>
+            </a:r>
+            <a:endParaRPr lang="en-US" sz="1200"/>
+          </a:p>
+          <a:p>
+            <a:pPr marL="0" indent="0">
+              <a:lnSpc>
+                <a:spcPts val="1560"/>
+              </a:lnSpc>
+              <a:spcAft>
+                <a:spcPts val="0"/>
+              </a:spcAft>
+              <a:buNone/>
+            </a:pPr>
+            <a:r>
+              <a:rPr lang="en-US" sz="1200" b="0">
+                <a:solidFill>
+                  <a:srgbClr val="202b33"/>
+                </a:solidFill>
+                <a:latin typeface="Arial"/>
+                <a:ea typeface="Arial"/>
+                <a:cs typeface="Arial"/>
+              </a:rPr>
+              <a:t xml:space="preserve">&gt; 32,805 plans per arm of evidence</a:t>
             </a:r>
             <a:endParaRPr lang="en-US" sz="1200"/>
           </a:p>
@@ -5418,7 +5740,7 @@
                 <a:ea typeface="Arial"/>
                 <a:cs typeface="Arial"/>
               </a:rPr>
-              <a:t xml:space="preserve">Bacchelli and Bird studied modern code review at Microsoft. Finding defects was the main motivation, but the observed benefits included more knowledge transfer, awareness, and alternative solutions than that motivation suggests. Understanding the change was central.</a:t>
+              <a:t xml:space="preserve">Six features. Order them: seven hundred and twenty sequences. Assign each to one of three cohorts: three to the sixth, seven hundred and twenty-nine. Multiply. Five hundred and twenty-four thousand, eight hundred and eighty distinct plans, and that is before batching and before dates.</a:t>
             </a:r>
             <a:endParaRPr lang="en-US" sz="1200"/>
           </a:p>
@@ -5464,7 +5786,7 @@
                 <a:ea typeface="Arial"/>
                 <a:cs typeface="Arial"/>
               </a:rPr>
-              <a:t xml:space="preserve">That gives the review queue more than one job. A check that proves a local invariant does not teach another engineer how this subsystem behaves. An agent summary does not guarantee that anyone could repair it next week.</a:t>
+              <a:t xml:space="preserve">Now the evidence you can buy. Twelve thousand weekly actives, a four-week window, forty-eight thousand exposures. At an eight percent baseline, detecting a two-point lift needs roughly three thousand per arm, so sixteen arms. Divide: thirty-two thousand, eight hundred and five plans for every arm of evidence you can afford. Benchmarks owns the power arithmetic; here I only need the count.</a:t>
             </a:r>
             <a:endParaRPr lang="en-US" sz="1200"/>
           </a:p>
@@ -5510,7 +5832,7 @@
                 <a:ea typeface="Arial"/>
                 <a:cs typeface="Arial"/>
               </a:rPr>
-              <a:t xml:space="preserve">Keep junior engineers in the reasoning. Let them write the acceptance case, explain a rejection, and follow a change through its consequences. If all the practice becomes watching green checks, we are removing the work that builds the next reviewer.</a:t>
+              <a:t xml:space="preserve">So turn the thinkin' tokens up. Chollet's 2019 definition treats intelligence as skill acquisition over novel tasks, and a system that has already seen the situation is not demonstrating that. Your product's next six months is a task nobody has seen, including you.</a:t>
             </a:r>
             <a:endParaRPr lang="en-US" sz="1200"/>
           </a:p>
@@ -5556,7 +5878,7 @@
                 <a:ea typeface="Arial"/>
                 <a:cs typeface="Arial"/>
               </a:rPr>
-              <a:t xml:space="preserve">Stage direction: Spend 45 seconds on how a junior engineer would learn the permission boundary from this change.</a:t>
+              <a:t xml:space="preserve">There is a paper about exactly this: the Apple group's Illusion of Thinking, 2025, reporting that reasoning models collapse past a complexity threshold and spend fewer tokens as problems get harder. There is also a published rebuttal arguing the collapse was token limits and one unsolvable puzzle. I am citing the exchange, not a verdict.</a:t>
             </a:r>
             <a:endParaRPr lang="en-US" sz="1200"/>
           </a:p>
@@ -5602,7 +5924,99 @@
                 <a:ea typeface="Arial"/>
                 <a:cs typeface="Arial"/>
               </a:rPr>
-              <a:t xml:space="preserve">Source: Alberto Bacchelli and Christian Bird (2013), [Expectations, Outcomes, and Challenges of Modern Code Review](https://www.cabird.com/pubs/bacchelli2013eoc.pdf), ICSE 2013.</a:t>
+              <a:t xml:space="preserve">My claim is weaker and safer. The model has not met your users. More tokens do not fix that, and neither does more of you, because your judgment is biased too. The difference is that you can write your prediction down before the release and check it afterward.</a:t>
+            </a:r>
+            <a:endParaRPr lang="en-US" sz="1200"/>
+          </a:p>
+          <a:p>
+            <a:pPr marL="0" indent="0">
+              <a:lnSpc>
+                <a:spcPts val="1560"/>
+              </a:lnSpc>
+              <a:spcAft>
+                <a:spcPts val="0"/>
+              </a:spcAft>
+              <a:buNone/>
+            </a:pPr>
+            <a:r>
+              <a:rPr lang="en-US" sz="1200" b="0">
+                <a:solidFill>
+                  <a:srgbClr val="202b33"/>
+                </a:solidFill>
+                <a:latin typeface="Arial"/>
+                <a:ea typeface="Arial"/>
+                <a:cs typeface="Arial"/>
+              </a:rPr>
+              <a:t xml:space="preserve"/>
+            </a:r>
+            <a:endParaRPr lang="en-US" sz="1200"/>
+          </a:p>
+          <a:p>
+            <a:pPr marL="0" indent="0">
+              <a:lnSpc>
+                <a:spcPts val="1560"/>
+              </a:lnSpc>
+              <a:spcAft>
+                <a:spcPts val="0"/>
+              </a:spcAft>
+              <a:buNone/>
+            </a:pPr>
+            <a:r>
+              <a:rPr lang="en-US" sz="1200" b="0">
+                <a:solidFill>
+                  <a:srgbClr val="202b33"/>
+                </a:solidFill>
+                <a:latin typeface="Arial"/>
+                <a:ea typeface="Arial"/>
+                <a:cs typeface="Arial"/>
+              </a:rPr>
+              <a:t xml:space="preserve">Stage direction: Run `bun artifacts/speaking-portfolio-expanded/talks/judgment/demo.ts` for the plan count, then add `--evidence` for the arm count. Do the final division on the board rather than reading it. Say once that the numbers are six features and three cohorts, not their company.</a:t>
+            </a:r>
+            <a:endParaRPr lang="en-US" sz="1200"/>
+          </a:p>
+          <a:p>
+            <a:pPr marL="0" indent="0">
+              <a:lnSpc>
+                <a:spcPts val="1560"/>
+              </a:lnSpc>
+              <a:spcAft>
+                <a:spcPts val="0"/>
+              </a:spcAft>
+              <a:buNone/>
+            </a:pPr>
+            <a:r>
+              <a:rPr lang="en-US" sz="1200" b="0">
+                <a:solidFill>
+                  <a:srgbClr val="202b33"/>
+                </a:solidFill>
+                <a:latin typeface="Arial"/>
+                <a:ea typeface="Arial"/>
+                <a:cs typeface="Arial"/>
+              </a:rPr>
+              <a:t xml:space="preserve"/>
+            </a:r>
+            <a:endParaRPr lang="en-US" sz="1200"/>
+          </a:p>
+          <a:p>
+            <a:pPr marL="0" indent="0">
+              <a:lnSpc>
+                <a:spcPts val="1560"/>
+              </a:lnSpc>
+              <a:spcAft>
+                <a:spcPts val="0"/>
+              </a:spcAft>
+              <a:buNone/>
+            </a:pPr>
+            <a:r>
+              <a:rPr lang="en-US" sz="1200" b="0">
+                <a:solidFill>
+                  <a:srgbClr val="202b33"/>
+                </a:solidFill>
+                <a:latin typeface="Arial"/>
+                <a:ea typeface="Arial"/>
+                <a:cs typeface="Arial"/>
+              </a:rPr>
+              <a:t xml:space="preserve">Source: François Chollet (2019), [On the Measure of Intelligence](https://arxiv.org/abs/1911.01547), arXiv:1911.01547. Parshin Shojaee and colleagues (2025), [The Illusion of Thinking](https://machinelearning.apple.com/research/illusion-of-thinking), Apple Machine Learning Research; and the rebuttal, [The Illusion of the Illusion of Thinking](https://arxiv.org/abs/2506.09250), arXiv:2506.09250. Present as a contested exchange, not a settled result.</a:t>
             </a:r>
             <a:endParaRPr lang="en-US" sz="1200"/>
           </a:p>
@@ -5715,7 +6129,7 @@
                 <a:ea typeface="Arial"/>
                 <a:cs typeface="Arial"/>
               </a:rPr>
-              <a:t xml:space="preserve">Demo: the rubber stamp</a:t>
+              <a:t xml:space="preserve">What the machine is actually for</a:t>
             </a:r>
             <a:endParaRPr lang="en-US" sz="1200"/>
           </a:p>
@@ -5761,7 +6175,7 @@
                 <a:ea typeface="Arial"/>
                 <a:cs typeface="Arial"/>
               </a:rPr>
-              <a:t xml:space="preserve">22:00 to 26:00 · peak</a:t>
+              <a:t xml:space="preserve">23:30 to 26:00 · build</a:t>
             </a:r>
             <a:endParaRPr lang="en-US" sz="1200"/>
           </a:p>
@@ -5807,53 +6221,53 @@
                 <a:ea typeface="Arial"/>
                 <a:cs typeface="Arial"/>
               </a:rPr>
-              <a:t xml:space="preserve">&gt; canEdit(user, resourceTenant) = user.roles.includes("admin")</a:t>
-            </a:r>
-            <a:endParaRPr lang="en-US" sz="1200"/>
-          </a:p>
-          <a:p>
-            <a:pPr marL="0" indent="0">
-              <a:lnSpc>
-                <a:spcPts val="1560"/>
-              </a:lnSpc>
-              <a:spcAft>
-                <a:spcPts val="0"/>
-              </a:spcAft>
-              <a:buNone/>
-            </a:pPr>
-            <a:r>
-              <a:rPr lang="en-US" sz="1200" b="0">
-                <a:solidFill>
-                  <a:srgbClr val="202b33"/>
-                </a:solidFill>
-                <a:latin typeface="Arial"/>
-                <a:ea typeface="Arial"/>
-                <a:cs typeface="Arial"/>
-              </a:rPr>
-              <a:t xml:space="preserve">&gt; Test: admin user → allowed</a:t>
-            </a:r>
-            <a:endParaRPr lang="en-US" sz="1200"/>
-          </a:p>
-          <a:p>
-            <a:pPr marL="0" indent="0">
-              <a:lnSpc>
-                <a:spcPts val="1560"/>
-              </a:lnSpc>
-              <a:spcAft>
-                <a:spcPts val="0"/>
-              </a:spcAft>
-              <a:buNone/>
-            </a:pPr>
-            <a:r>
-              <a:rPr lang="en-US" sz="1200" b="0">
-                <a:solidFill>
-                  <a:srgbClr val="202b33"/>
-                </a:solidFill>
-                <a:latin typeface="Arial"/>
-                <a:ea typeface="Arial"/>
-                <a:cs typeface="Arial"/>
-              </a:rPr>
-              <a:t xml:space="preserve">&gt; PASS</a:t>
+              <a:t xml:space="preserve">&gt; Cluster 4,000 support threads → yes</a:t>
+            </a:r>
+            <a:endParaRPr lang="en-US" sz="1200"/>
+          </a:p>
+          <a:p>
+            <a:pPr marL="0" indent="0">
+              <a:lnSpc>
+                <a:spcPts val="1560"/>
+              </a:lnSpc>
+              <a:spcAft>
+                <a:spcPts val="0"/>
+              </a:spcAft>
+              <a:buNone/>
+            </a:pPr>
+            <a:r>
+              <a:rPr lang="en-US" sz="1200" b="0">
+                <a:solidFill>
+                  <a:srgbClr val="202b33"/>
+                </a:solidFill>
+                <a:latin typeface="Arial"/>
+                <a:ea typeface="Arial"/>
+                <a:cs typeface="Arial"/>
+              </a:rPr>
+              <a:t xml:space="preserve">&gt; Choose the order → no</a:t>
+            </a:r>
+            <a:endParaRPr lang="en-US" sz="1200"/>
+          </a:p>
+          <a:p>
+            <a:pPr marL="0" indent="0">
+              <a:lnSpc>
+                <a:spcPts val="1560"/>
+              </a:lnSpc>
+              <a:spcAft>
+                <a:spcPts val="0"/>
+              </a:spcAft>
+              <a:buNone/>
+            </a:pPr>
+            <a:r>
+              <a:rPr lang="en-US" sz="1200" b="0">
+                <a:solidFill>
+                  <a:srgbClr val="202b33"/>
+                </a:solidFill>
+                <a:latin typeface="Arial"/>
+                <a:ea typeface="Arial"/>
+                <a:cs typeface="Arial"/>
+              </a:rPr>
+              <a:t xml:space="preserve">&gt; It proposes. You sequence.</a:t>
             </a:r>
             <a:endParaRPr lang="en-US" sz="1200"/>
           </a:p>
@@ -5899,7 +6313,7 @@
                 <a:ea typeface="Arial"/>
                 <a:cs typeface="Arial"/>
               </a:rPr>
-              <a:t xml:space="preserve">Here is the implementation. Here is its test. The user has the admin role. The function allows the edit. The test passes.</a:t>
+              <a:t xml:space="preserve">This is not an anti-AI slide, and the useful list is long. Cluster four thousand support threads by complaint. Find the twelve accounts whose usage pattern matches the cohort you are about to change. Draft the rollout plan, the docs diff and the support macro at once.</a:t>
             </a:r>
             <a:endParaRPr lang="en-US" sz="1200"/>
           </a:p>
@@ -5945,7 +6359,7 @@
                 <a:ea typeface="Arial"/>
                 <a:cs typeface="Arial"/>
               </a:rPr>
-              <a:t xml:space="preserve">The resource tenant is right there in the signature. Nothing reads it. And you already heard the cross-tenant case, back on the spec slide. Watch the vote anyway.</a:t>
+              <a:t xml:space="preserve">Better, have it hunt the conflict you would have missed. Your release week is the week two of your three support engineers are at a conference. The workflow you are about to move belongs to your top three renewals this quarter. That is a search problem, and search is what it is good at.</a:t>
             </a:r>
             <a:endParaRPr lang="en-US" sz="1200"/>
           </a:p>
@@ -5991,191 +6405,7 @@
                 <a:ea typeface="Arial"/>
                 <a:cs typeface="Arial"/>
               </a:rPr>
-              <a:t xml:space="preserve">Would you approve it? Now run the case where that administrator belongs to tenant A and the resource belongs to tenant B. The test was accurate about the behavior it checked. The behavior was incomplete in exactly the same way as the implementation.</a:t>
-            </a:r>
-            <a:endParaRPr lang="en-US" sz="1200"/>
-          </a:p>
-          <a:p>
-            <a:pPr marL="0" indent="0">
-              <a:lnSpc>
-                <a:spcPts val="1560"/>
-              </a:lnSpc>
-              <a:spcAft>
-                <a:spcPts val="0"/>
-              </a:spcAft>
-              <a:buNone/>
-            </a:pPr>
-            <a:r>
-              <a:rPr lang="en-US" sz="1200" b="0">
-                <a:solidFill>
-                  <a:srgbClr val="202b33"/>
-                </a:solidFill>
-                <a:latin typeface="Arial"/>
-                <a:ea typeface="Arial"/>
-                <a:cs typeface="Arial"/>
-              </a:rPr>
-              <a:t xml:space="preserve"/>
-            </a:r>
-            <a:endParaRPr lang="en-US" sz="1200"/>
-          </a:p>
-          <a:p>
-            <a:pPr marL="0" indent="0">
-              <a:lnSpc>
-                <a:spcPts val="1560"/>
-              </a:lnSpc>
-              <a:spcAft>
-                <a:spcPts val="0"/>
-              </a:spcAft>
-              <a:buNone/>
-            </a:pPr>
-            <a:r>
-              <a:rPr lang="en-US" sz="1200" b="0">
-                <a:solidFill>
-                  <a:srgbClr val="202b33"/>
-                </a:solidFill>
-                <a:latin typeface="Arial"/>
-                <a:ea typeface="Arial"/>
-                <a:cs typeface="Arial"/>
-              </a:rPr>
-              <a:t xml:space="preserve">The model wrote the test that agrees with the bug. Both of them are very confident.</a:t>
-            </a:r>
-            <a:endParaRPr lang="en-US" sz="1200"/>
-          </a:p>
-          <a:p>
-            <a:pPr marL="0" indent="0">
-              <a:lnSpc>
-                <a:spcPts val="1560"/>
-              </a:lnSpc>
-              <a:spcAft>
-                <a:spcPts val="0"/>
-              </a:spcAft>
-              <a:buNone/>
-            </a:pPr>
-            <a:r>
-              <a:rPr lang="en-US" sz="1200" b="0">
-                <a:solidFill>
-                  <a:srgbClr val="202b33"/>
-                </a:solidFill>
-                <a:latin typeface="Arial"/>
-                <a:ea typeface="Arial"/>
-                <a:cs typeface="Arial"/>
-              </a:rPr>
-              <a:t xml:space="preserve"/>
-            </a:r>
-            <a:endParaRPr lang="en-US" sz="1200"/>
-          </a:p>
-          <a:p>
-            <a:pPr marL="0" indent="0">
-              <a:lnSpc>
-                <a:spcPts val="1560"/>
-              </a:lnSpc>
-              <a:spcAft>
-                <a:spcPts val="0"/>
-              </a:spcAft>
-              <a:buNone/>
-            </a:pPr>
-            <a:r>
-              <a:rPr lang="en-US" sz="1200" b="0">
-                <a:solidFill>
-                  <a:srgbClr val="202b33"/>
-                </a:solidFill>
-                <a:latin typeface="Arial"/>
-                <a:ea typeface="Arial"/>
-                <a:cs typeface="Arial"/>
-              </a:rPr>
-              <a:t xml:space="preserve">Bainbridge asks what automation leaves the operator doing. Skitka and colleagues put people in a flight simulator with an automated monitoring aid and counted the trials where the aid was wrong. On those trials people missed events the aid did not flag, and acted on prompts the other instruments contradicted. That is the whole finding, and it is about the trials where the aid was wrong. This fixture is how the same concern shows up in our queue: the green signal gets attention that the missing case did not.</a:t>
-            </a:r>
-            <a:endParaRPr lang="en-US" sz="1200"/>
-          </a:p>
-          <a:p>
-            <a:pPr marL="0" indent="0">
-              <a:lnSpc>
-                <a:spcPts val="1560"/>
-              </a:lnSpc>
-              <a:spcAft>
-                <a:spcPts val="0"/>
-              </a:spcAft>
-              <a:buNone/>
-            </a:pPr>
-            <a:r>
-              <a:rPr lang="en-US" sz="1200" b="0">
-                <a:solidFill>
-                  <a:srgbClr val="202b33"/>
-                </a:solidFill>
-                <a:latin typeface="Arial"/>
-                <a:ea typeface="Arial"/>
-                <a:cs typeface="Arial"/>
-              </a:rPr>
-              <a:t xml:space="preserve"/>
-            </a:r>
-            <a:endParaRPr lang="en-US" sz="1200"/>
-          </a:p>
-          <a:p>
-            <a:pPr marL="0" indent="0">
-              <a:lnSpc>
-                <a:spcPts val="1560"/>
-              </a:lnSpc>
-              <a:spcAft>
-                <a:spcPts val="0"/>
-              </a:spcAft>
-              <a:buNone/>
-            </a:pPr>
-            <a:r>
-              <a:rPr lang="en-US" sz="1200" b="0">
-                <a:solidFill>
-                  <a:srgbClr val="202b33"/>
-                </a:solidFill>
-                <a:latin typeface="Arial"/>
-                <a:ea typeface="Arial"/>
-                <a:cs typeface="Arial"/>
-              </a:rPr>
-              <a:t xml:space="preserve">Stage direction: Open contracts.md only after the vote. Run `bun artifacts/speaking-portfolio-expanded/packets/judgment/demo.ts` for PASS, then add `--holdout` for the actual failing assertion. Do not assume the room approves; if someone catches it, ask which evidence caught their attention.</a:t>
-            </a:r>
-            <a:endParaRPr lang="en-US" sz="1200"/>
-          </a:p>
-          <a:p>
-            <a:pPr marL="0" indent="0">
-              <a:lnSpc>
-                <a:spcPts val="1560"/>
-              </a:lnSpc>
-              <a:spcAft>
-                <a:spcPts val="0"/>
-              </a:spcAft>
-              <a:buNone/>
-            </a:pPr>
-            <a:r>
-              <a:rPr lang="en-US" sz="1200" b="0">
-                <a:solidFill>
-                  <a:srgbClr val="202b33"/>
-                </a:solidFill>
-                <a:latin typeface="Arial"/>
-                <a:ea typeface="Arial"/>
-                <a:cs typeface="Arial"/>
-              </a:rPr>
-              <a:t xml:space="preserve"/>
-            </a:r>
-            <a:endParaRPr lang="en-US" sz="1200"/>
-          </a:p>
-          <a:p>
-            <a:pPr marL="0" indent="0">
-              <a:lnSpc>
-                <a:spcPts val="1560"/>
-              </a:lnSpc>
-              <a:spcAft>
-                <a:spcPts val="0"/>
-              </a:spcAft>
-              <a:buNone/>
-            </a:pPr>
-            <a:r>
-              <a:rPr lang="en-US" sz="1200" b="0">
-                <a:solidFill>
-                  <a:srgbClr val="202b33"/>
-                </a:solidFill>
-                <a:latin typeface="Arial"/>
-                <a:ea typeface="Arial"/>
-                <a:cs typeface="Arial"/>
-              </a:rPr>
-              <a:t xml:space="preserve">Source: Lisanne Bainbridge (1983), [Ironies of automation](https://www.sciencedirect.com/science/article/pii/0005109883900468), Automatica 19(6), 775–779. Linda J. Skitka, Kathleen L. Mosier and Mark Burdick (1999), [Does automation bias decision-making?](https://doi.org/10.1006/ijhc.1999.0252), International Journal of Human-Computer Studies 51(5), 991–1006. A flight-simulation task with a monitoring aid, not a code-review trial.</a:t>
+              <a:t xml:space="preserve">What it cannot do is care which one your users will love, because it has never met them and because the answer does not exist yet. It proposes. You sequence. Then you own the sequence.</a:t>
             </a:r>
             <a:endParaRPr lang="en-US" sz="1200"/>
           </a:p>
@@ -6359,7 +6589,7 @@
                 <a:ea typeface="Arial"/>
                 <a:cs typeface="Arial"/>
               </a:rPr>
-              <a:t xml:space="preserve">Code Is Cheap. Judgment Is Expensive. · Dan Levy</a:t>
+              <a:t xml:space="preserve">Turn Your Thinkin' Tokens Up to 11 · Dan Levy</a:t>
             </a:r>
             <a:endParaRPr lang="en-US" sz="1350"/>
           </a:p>
@@ -6408,7 +6638,7 @@
                 <a:ea typeface="Arial"/>
                 <a:cs typeface="Arial"/>
               </a:rPr>
-              <a:t xml:space="preserve">The morning four good implementations arrive</a:t>
+              <a:t xml:space="preserve">These go to eleven</a:t>
             </a:r>
             <a:endParaRPr lang="en-US" sz="3900"/>
           </a:p>
@@ -6506,7 +6736,7 @@
                 <a:ea typeface="Arial"/>
                 <a:cs typeface="Arial"/>
               </a:rPr>
-              <a:t xml:space="preserve">95% utilized → 19× waiting</a:t>
+              <a:t xml:space="preserve">Code is free. Features are free.</a:t>
             </a:r>
             <a:endParaRPr lang="en-US" sz="3150"/>
           </a:p>
@@ -6604,7 +6834,7 @@
                 <a:ea typeface="Arial"/>
                 <a:cs typeface="Arial"/>
               </a:rPr>
-              <a:t xml:space="preserve">Four plausible implementations. One reviewer.</a:t>
+              <a:t xml:space="preserve">Attention is the budget.</a:t>
             </a:r>
             <a:endParaRPr lang="en-US" sz="3150"/>
           </a:p>
@@ -6653,7 +6883,7 @@
                 <a:ea typeface="Arial"/>
                 <a:cs typeface="Arial"/>
               </a:rPr>
-              <a:t xml:space="preserve">Code Is Cheap. Judgment Is Expensive.</a:t>
+              <a:t xml:space="preserve">Turn Your Thinkin' Tokens Up to 11</a:t>
             </a:r>
             <a:endParaRPr lang="en-US" sz="975"/>
           </a:p>
@@ -6833,7 +7063,7 @@
                 <a:ea typeface="Arial"/>
                 <a:cs typeface="Arial"/>
               </a:rPr>
-              <a:t xml:space="preserve">Do not appoint a crumple zone</a:t>
+              <a:t xml:space="preserve">Prediction: the version picker</a:t>
             </a:r>
             <a:endParaRPr lang="en-US" sz="3900"/>
           </a:p>
@@ -6841,203 +7071,62 @@
       </p:sp>
       <p:sp>
         <p:nvSpPr>
-          <p:cNvPr id="4" name="Text 4"/>
-          <p:cNvSpPr txBox="1"/>
+          <p:cNvPr id="4" name="Image background"/>
+          <p:cNvSpPr/>
           <p:nvPr/>
         </p:nvSpPr>
         <p:spPr>
           <a:xfrm>
-            <a:off x="685800" y="2771775"/>
-            <a:ext cx="904875" cy="476250"/>
+            <a:off x="944880" y="2647950"/>
+            <a:ext cx="11826240" cy="4619625"/>
           </a:xfrm>
           <a:prstGeom prst="rect">
             <a:avLst/>
           </a:prstGeom>
-          <a:noFill/>
+          <a:solidFill>
+            <a:srgbClr val="161D26"/>
+          </a:solidFill>
           <a:ln>
             <a:noFill/>
           </a:ln>
         </p:spPr>
-        <p:txBody>
-          <a:bodyPr wrap="none" lIns="0" tIns="0" rIns="0" bIns="0" anchor="t">
-            <a:noAutofit/>
-          </a:bodyPr>
-          <a:lstStyle/>
-          <a:p>
-            <a:pPr marL="0" indent="0">
-              <a:lnSpc>
-                <a:spcPts val="2438"/>
-              </a:lnSpc>
-              <a:spcAft>
-                <a:spcPts val="0"/>
-              </a:spcAft>
-              <a:buNone/>
-            </a:pPr>
-            <a:r>
-              <a:rPr lang="en-US" sz="1875" b="0">
-                <a:solidFill>
-                  <a:srgbClr val="EFB45F"/>
-                </a:solidFill>
-                <a:latin typeface="Arial"/>
-                <a:ea typeface="Arial"/>
-                <a:cs typeface="Arial"/>
-              </a:rPr>
-              <a:t xml:space="preserve">01</a:t>
-            </a:r>
-            <a:endParaRPr lang="en-US" sz="1875"/>
-          </a:p>
-        </p:txBody>
       </p:sp>
-      <p:sp>
-        <p:nvSpPr>
-          <p:cNvPr id="5" name="Text 5"/>
-          <p:cNvSpPr txBox="1"/>
+      <p:pic>
+        <p:nvPicPr>
+          <p:cNvPr id="5" name="237341e722f69667f7c423de1199c47784318efda85e9448d97e24c6015db4c6" descr="A settings panel where version sits beside theme and language"/>
+          <p:cNvPicPr>
+            <a:picLocks noChangeAspect="1"/>
+          </p:cNvPicPr>
           <p:nvPr/>
-        </p:nvSpPr>
+        </p:nvPicPr>
+        <p:blipFill>
+          <a:blip r:embed="rIdImage1">
+            <a:extLst>
+              <a:ext uri="{96DAC541-7B7A-43D3-8B79-37D633B846F1}">
+                <asvg:svgBlip xmlns:asvg="http://schemas.microsoft.com/office/drawing/2016/SVG/main" r:embed="rIdSvg1"/>
+              </a:ext>
+            </a:extLst>
+          </a:blip>
+          <a:stretch>
+            <a:fillRect/>
+          </a:stretch>
+        </p:blipFill>
         <p:spPr>
           <a:xfrm>
-            <a:off x="2000250" y="2771775"/>
-            <a:ext cx="11029950" cy="539115"/>
+            <a:off x="944880" y="2647950"/>
+            <a:ext cx="11826240" cy="4619625"/>
           </a:xfrm>
           <a:prstGeom prst="rect">
             <a:avLst/>
           </a:prstGeom>
-          <a:noFill/>
           <a:ln>
             <a:noFill/>
           </a:ln>
         </p:spPr>
-        <p:txBody>
-          <a:bodyPr wrap="none" lIns="0" tIns="0" rIns="0" bIns="0" anchor="t">
-            <a:noAutofit/>
-          </a:bodyPr>
-          <a:lstStyle/>
-          <a:p>
-            <a:pPr marL="0" indent="0">
-              <a:lnSpc>
-                <a:spcPts val="4095"/>
-              </a:lnSpc>
-              <a:spcAft>
-                <a:spcPts val="0"/>
-              </a:spcAft>
-              <a:buNone/>
-            </a:pPr>
-            <a:r>
-              <a:rPr lang="en-US" sz="3150" b="0">
-                <a:solidFill>
-                  <a:srgbClr val="F5F1E9"/>
-                </a:solidFill>
-                <a:latin typeface="Arial"/>
-                <a:ea typeface="Arial"/>
-                <a:cs typeface="Arial"/>
-              </a:rPr>
-              <a:t xml:space="preserve">Responsibility must come with control</a:t>
-            </a:r>
-            <a:endParaRPr lang="en-US" sz="3150"/>
-          </a:p>
-        </p:txBody>
-      </p:sp>
+      </p:pic>
       <p:sp>
         <p:nvSpPr>
           <p:cNvPr id="6" name="Text 6"/>
-          <p:cNvSpPr txBox="1"/>
-          <p:nvPr/>
-        </p:nvSpPr>
-        <p:spPr>
-          <a:xfrm>
-            <a:off x="685800" y="3558540"/>
-            <a:ext cx="904875" cy="476250"/>
-          </a:xfrm>
-          <a:prstGeom prst="rect">
-            <a:avLst/>
-          </a:prstGeom>
-          <a:noFill/>
-          <a:ln>
-            <a:noFill/>
-          </a:ln>
-        </p:spPr>
-        <p:txBody>
-          <a:bodyPr wrap="none" lIns="0" tIns="0" rIns="0" bIns="0" anchor="t">
-            <a:noAutofit/>
-          </a:bodyPr>
-          <a:lstStyle/>
-          <a:p>
-            <a:pPr marL="0" indent="0">
-              <a:lnSpc>
-                <a:spcPts val="2438"/>
-              </a:lnSpc>
-              <a:spcAft>
-                <a:spcPts val="0"/>
-              </a:spcAft>
-              <a:buNone/>
-            </a:pPr>
-            <a:r>
-              <a:rPr lang="en-US" sz="1875" b="0">
-                <a:solidFill>
-                  <a:srgbClr val="EFB45F"/>
-                </a:solidFill>
-                <a:latin typeface="Arial"/>
-                <a:ea typeface="Arial"/>
-                <a:cs typeface="Arial"/>
-              </a:rPr>
-              <a:t xml:space="preserve">02</a:t>
-            </a:r>
-            <a:endParaRPr lang="en-US" sz="1875"/>
-          </a:p>
-        </p:txBody>
-      </p:sp>
-      <p:sp>
-        <p:nvSpPr>
-          <p:cNvPr id="7" name="Text 7"/>
-          <p:cNvSpPr txBox="1"/>
-          <p:nvPr/>
-        </p:nvSpPr>
-        <p:spPr>
-          <a:xfrm>
-            <a:off x="2000250" y="3558540"/>
-            <a:ext cx="11029950" cy="539115"/>
-          </a:xfrm>
-          <a:prstGeom prst="rect">
-            <a:avLst/>
-          </a:prstGeom>
-          <a:noFill/>
-          <a:ln>
-            <a:noFill/>
-          </a:ln>
-        </p:spPr>
-        <p:txBody>
-          <a:bodyPr wrap="none" lIns="0" tIns="0" rIns="0" bIns="0" anchor="t">
-            <a:noAutofit/>
-          </a:bodyPr>
-          <a:lstStyle/>
-          <a:p>
-            <a:pPr marL="0" indent="0">
-              <a:lnSpc>
-                <a:spcPts val="4095"/>
-              </a:lnSpc>
-              <a:spcAft>
-                <a:spcPts val="0"/>
-              </a:spcAft>
-              <a:buNone/>
-            </a:pPr>
-            <a:r>
-              <a:rPr lang="en-US" sz="3150" b="0">
-                <a:solidFill>
-                  <a:srgbClr val="F5F1E9"/>
-                </a:solidFill>
-                <a:latin typeface="Arial"/>
-                <a:ea typeface="Arial"/>
-                <a:cs typeface="Arial"/>
-              </a:rPr>
-              <a:t xml:space="preserve">Who accepts, recovers, and maintains?</a:t>
-            </a:r>
-            <a:endParaRPr lang="en-US" sz="3150"/>
-          </a:p>
-        </p:txBody>
-      </p:sp>
-      <p:sp>
-        <p:nvSpPr>
-          <p:cNvPr id="8" name="Text 8"/>
           <p:cNvSpPr txBox="1"/>
           <p:nvPr/>
         </p:nvSpPr>
@@ -7078,7 +7167,7 @@
                 <a:ea typeface="Arial"/>
                 <a:cs typeface="Arial"/>
               </a:rPr>
-              <a:t xml:space="preserve">Code Is Cheap. Judgment Is Expensive.</a:t>
+              <a:t xml:space="preserve">Turn Your Thinkin' Tokens Up to 11</a:t>
             </a:r>
             <a:endParaRPr lang="en-US" sz="975"/>
           </a:p>
@@ -7086,7 +7175,7 @@
       </p:sp>
       <p:sp>
         <p:nvSpPr>
-          <p:cNvPr id="9" name="Text 9"/>
+          <p:cNvPr id="7" name="Text 7"/>
           <p:cNvSpPr txBox="1"/>
           <p:nvPr/>
         </p:nvSpPr>
@@ -7258,7 +7347,7 @@
                 <a:ea typeface="Arial"/>
                 <a:cs typeface="Arial"/>
               </a:rPr>
-              <a:t xml:space="preserve">Essence and accident</a:t>
+              <a:t xml:space="preserve">What that costs to build</a:t>
             </a:r>
             <a:endParaRPr lang="en-US" sz="3900"/>
           </a:p>
@@ -7356,7 +7445,7 @@
                 <a:ea typeface="Arial"/>
                 <a:cs typeface="Arial"/>
               </a:rPr>
-              <a:t xml:space="preserve">Generating a branch is cheap</a:t>
+              <a:t xml:space="preserve">Versioned runtime + a sandbox per user</a:t>
             </a:r>
             <a:endParaRPr lang="en-US" sz="3150"/>
           </a:p>
@@ -7454,7 +7543,7 @@
                 <a:ea typeface="Arial"/>
                 <a:cs typeface="Arial"/>
               </a:rPr>
-              <a:t xml:space="preserve">Choosing the permission boundary is still work</a:t>
+              <a:t xml:space="preserve">Privacy: better. Patching: worse.</a:t>
             </a:r>
             <a:endParaRPr lang="en-US" sz="3150"/>
           </a:p>
@@ -7463,6 +7552,104 @@
       <p:sp>
         <p:nvSpPr>
           <p:cNvPr id="8" name="Text 8"/>
+          <p:cNvSpPr txBox="1"/>
+          <p:nvPr/>
+        </p:nvSpPr>
+        <p:spPr>
+          <a:xfrm>
+            <a:off x="685800" y="4345305"/>
+            <a:ext cx="904875" cy="476250"/>
+          </a:xfrm>
+          <a:prstGeom prst="rect">
+            <a:avLst/>
+          </a:prstGeom>
+          <a:noFill/>
+          <a:ln>
+            <a:noFill/>
+          </a:ln>
+        </p:spPr>
+        <p:txBody>
+          <a:bodyPr wrap="none" lIns="0" tIns="0" rIns="0" bIns="0" anchor="t">
+            <a:noAutofit/>
+          </a:bodyPr>
+          <a:lstStyle/>
+          <a:p>
+            <a:pPr marL="0" indent="0">
+              <a:lnSpc>
+                <a:spcPts val="2438"/>
+              </a:lnSpc>
+              <a:spcAft>
+                <a:spcPts val="0"/>
+              </a:spcAft>
+              <a:buNone/>
+            </a:pPr>
+            <a:r>
+              <a:rPr lang="en-US" sz="1875" b="0">
+                <a:solidFill>
+                  <a:srgbClr val="EFB45F"/>
+                </a:solidFill>
+                <a:latin typeface="Arial"/>
+                <a:ea typeface="Arial"/>
+                <a:cs typeface="Arial"/>
+              </a:rPr>
+              <a:t xml:space="preserve">03</a:t>
+            </a:r>
+            <a:endParaRPr lang="en-US" sz="1875"/>
+          </a:p>
+        </p:txBody>
+      </p:sp>
+      <p:sp>
+        <p:nvSpPr>
+          <p:cNvPr id="9" name="Text 9"/>
+          <p:cNvSpPr txBox="1"/>
+          <p:nvPr/>
+        </p:nvSpPr>
+        <p:spPr>
+          <a:xfrm>
+            <a:off x="2000250" y="4345305"/>
+            <a:ext cx="11029950" cy="539115"/>
+          </a:xfrm>
+          <a:prstGeom prst="rect">
+            <a:avLst/>
+          </a:prstGeom>
+          <a:noFill/>
+          <a:ln>
+            <a:noFill/>
+          </a:ln>
+        </p:spPr>
+        <p:txBody>
+          <a:bodyPr wrap="none" lIns="0" tIns="0" rIns="0" bIns="0" anchor="t">
+            <a:noAutofit/>
+          </a:bodyPr>
+          <a:lstStyle/>
+          <a:p>
+            <a:pPr marL="0" indent="0">
+              <a:lnSpc>
+                <a:spcPts val="4095"/>
+              </a:lnSpc>
+              <a:spcAft>
+                <a:spcPts val="0"/>
+              </a:spcAft>
+              <a:buNone/>
+            </a:pPr>
+            <a:r>
+              <a:rPr lang="en-US" sz="3150" b="0">
+                <a:solidFill>
+                  <a:srgbClr val="F5F1E9"/>
+                </a:solidFill>
+                <a:latin typeface="Arial"/>
+                <a:ea typeface="Arial"/>
+                <a:cs typeface="Arial"/>
+              </a:rPr>
+              <a:t xml:space="preserve">Every live version is a live contract</a:t>
+            </a:r>
+            <a:endParaRPr lang="en-US" sz="3150"/>
+          </a:p>
+        </p:txBody>
+      </p:sp>
+      <p:sp>
+        <p:nvSpPr>
+          <p:cNvPr id="10" name="Text 10"/>
           <p:cNvSpPr txBox="1"/>
           <p:nvPr/>
         </p:nvSpPr>
@@ -7503,7 +7690,7 @@
                 <a:ea typeface="Arial"/>
                 <a:cs typeface="Arial"/>
               </a:rPr>
-              <a:t xml:space="preserve">Code Is Cheap. Judgment Is Expensive.</a:t>
+              <a:t xml:space="preserve">Turn Your Thinkin' Tokens Up to 11</a:t>
             </a:r>
             <a:endParaRPr lang="en-US" sz="975"/>
           </a:p>
@@ -7511,7 +7698,7 @@
       </p:sp>
       <p:sp>
         <p:nvSpPr>
-          <p:cNvPr id="9" name="Text 9"/>
+          <p:cNvPr id="11" name="Text 11"/>
           <p:cNvSpPr txBox="1"/>
           <p:nvPr/>
         </p:nvSpPr>
@@ -7683,7 +7870,7 @@
                 <a:ea typeface="Arial"/>
                 <a:cs typeface="Arial"/>
               </a:rPr>
-              <a:t xml:space="preserve">Three levers on the queue</a:t>
+              <a:t xml:space="preserve">Prediction: the app your neighbor configured</a:t>
             </a:r>
             <a:endParaRPr lang="en-US" sz="3900"/>
           </a:p>
@@ -7781,7 +7968,7 @@
                 <a:ea typeface="Arial"/>
                 <a:cs typeface="Arial"/>
               </a:rPr>
-              <a:t xml:space="preserve">Arrivals: decline work before generating it</a:t>
+              <a:t xml:space="preserve">"Turn on what people like me have on"</a:t>
             </a:r>
             <a:endParaRPr lang="en-US" sz="3150"/>
           </a:p>
@@ -7879,7 +8066,7 @@
                 <a:ea typeface="Arial"/>
                 <a:cs typeface="Arial"/>
               </a:rPr>
-              <a:t xml:space="preserve">Variance: bounded diffs and explicit behavior</a:t>
+              <a:t xml:space="preserve">Shareable configuration profiles</a:t>
             </a:r>
             <a:endParaRPr lang="en-US" sz="3150"/>
           </a:p>
@@ -7977,7 +8164,7 @@
                 <a:ea typeface="Arial"/>
                 <a:cs typeface="Arial"/>
               </a:rPr>
-              <a:t xml:space="preserve">Utilization: reserve actual review capacity</a:t>
+              <a:t xml:space="preserve">Developers have done this for thirty years</a:t>
             </a:r>
             <a:endParaRPr lang="en-US" sz="3150"/>
           </a:p>
@@ -8026,7 +8213,7 @@
                 <a:ea typeface="Arial"/>
                 <a:cs typeface="Arial"/>
               </a:rPr>
-              <a:t xml:space="preserve">Code Is Cheap. Judgment Is Expensive.</a:t>
+              <a:t xml:space="preserve">Turn Your Thinkin' Tokens Up to 11</a:t>
             </a:r>
             <a:endParaRPr lang="en-US" sz="975"/>
           </a:p>
@@ -8206,7 +8393,7 @@
                 <a:ea typeface="Arial"/>
                 <a:cs typeface="Arial"/>
               </a:rPr>
-              <a:t xml:space="preserve">Measure the wait, not the output</a:t>
+              <a:t xml:space="preserve">Everyone runs a different app now</a:t>
             </a:r>
             <a:endParaRPr lang="en-US" sz="3900"/>
           </a:p>
@@ -8304,7 +8491,7 @@
                 <a:ea typeface="Arial"/>
                 <a:cs typeface="Arial"/>
               </a:rPr>
-              <a:t xml:space="preserve">Ready → first review → accepted</a:t>
+              <a:t xml:space="preserve">Support: "which app do you have?"</a:t>
             </a:r>
             <a:endParaRPr lang="en-US" sz="3150"/>
           </a:p>
@@ -8402,7 +8589,7 @@
                 <a:ea typeface="Arial"/>
                 <a:cs typeface="Arial"/>
               </a:rPr>
-              <a:t xml:space="preserve">Hands-on review time ÷ available review time</a:t>
+              <a:t xml:space="preserve">Screenshots · A/B baselines · accessibility defaults</a:t>
             </a:r>
             <a:endParaRPr lang="en-US" sz="3150"/>
           </a:p>
@@ -8500,7 +8687,7 @@
                 <a:ea typeface="Arial"/>
                 <a:cs typeface="Arial"/>
               </a:rPr>
-              <a:t xml:space="preserve">Queue age and escaped defects beside throughput</a:t>
+              <a:t xml:space="preserve">Same as it ever was: defaults still win</a:t>
             </a:r>
             <a:endParaRPr lang="en-US" sz="3150"/>
           </a:p>
@@ -8549,7 +8736,7 @@
                 <a:ea typeface="Arial"/>
                 <a:cs typeface="Arial"/>
               </a:rPr>
-              <a:t xml:space="preserve">Code Is Cheap. Judgment Is Expensive.</a:t>
+              <a:t xml:space="preserve">Turn Your Thinkin' Tokens Up to 11</a:t>
             </a:r>
             <a:endParaRPr lang="en-US" sz="975"/>
           </a:p>
@@ -8729,7 +8916,7 @@
                 <a:ea typeface="Arial"/>
                 <a:cs typeface="Arial"/>
               </a:rPr>
-              <a:t xml:space="preserve">Knowing when to stop</a:t>
+              <a:t xml:space="preserve">Knowing what not to ship</a:t>
             </a:r>
             <a:endParaRPr lang="en-US" sz="3900"/>
           </a:p>
@@ -8737,62 +8924,203 @@
       </p:sp>
       <p:sp>
         <p:nvSpPr>
-          <p:cNvPr id="4" name="Image background"/>
-          <p:cNvSpPr/>
+          <p:cNvPr id="4" name="Text 4"/>
+          <p:cNvSpPr txBox="1"/>
           <p:nvPr/>
         </p:nvSpPr>
         <p:spPr>
           <a:xfrm>
-            <a:off x="944880" y="2647950"/>
-            <a:ext cx="11826240" cy="4619625"/>
+            <a:off x="685800" y="2771775"/>
+            <a:ext cx="904875" cy="476250"/>
           </a:xfrm>
           <a:prstGeom prst="rect">
             <a:avLst/>
           </a:prstGeom>
-          <a:solidFill>
-            <a:srgbClr val="161D26"/>
-          </a:solidFill>
+          <a:noFill/>
           <a:ln>
             <a:noFill/>
           </a:ln>
         </p:spPr>
+        <p:txBody>
+          <a:bodyPr wrap="none" lIns="0" tIns="0" rIns="0" bIns="0" anchor="t">
+            <a:noAutofit/>
+          </a:bodyPr>
+          <a:lstStyle/>
+          <a:p>
+            <a:pPr marL="0" indent="0">
+              <a:lnSpc>
+                <a:spcPts val="2438"/>
+              </a:lnSpc>
+              <a:spcAft>
+                <a:spcPts val="0"/>
+              </a:spcAft>
+              <a:buNone/>
+            </a:pPr>
+            <a:r>
+              <a:rPr lang="en-US" sz="1875" b="0">
+                <a:solidFill>
+                  <a:srgbClr val="EFB45F"/>
+                </a:solidFill>
+                <a:latin typeface="Arial"/>
+                <a:ea typeface="Arial"/>
+                <a:cs typeface="Arial"/>
+              </a:rPr>
+              <a:t xml:space="preserve">01</a:t>
+            </a:r>
+            <a:endParaRPr lang="en-US" sz="1875"/>
+          </a:p>
+        </p:txBody>
       </p:sp>
-      <p:pic>
-        <p:nvPicPr>
-          <p:cNvPr id="5" name="8de9aa7b0e58010a491d155d2a0aaafbe5d48c9d4da5759fad5af686b3fce993" descr="Kingman: queue wait vs reviewer utilization, variability factor one"/>
-          <p:cNvPicPr>
-            <a:picLocks noChangeAspect="1"/>
-          </p:cNvPicPr>
+      <p:sp>
+        <p:nvSpPr>
+          <p:cNvPr id="5" name="Text 5"/>
+          <p:cNvSpPr txBox="1"/>
           <p:nvPr/>
-        </p:nvPicPr>
-        <p:blipFill>
-          <a:blip r:embed="rIdImage1">
-            <a:extLst>
-              <a:ext uri="{96DAC541-7B7A-43D3-8B79-37D633B846F1}">
-                <asvg:svgBlip xmlns:asvg="http://schemas.microsoft.com/office/drawing/2016/SVG/main" r:embed="rIdSvg1"/>
-              </a:ext>
-            </a:extLst>
-          </a:blip>
-          <a:stretch>
-            <a:fillRect/>
-          </a:stretch>
-        </p:blipFill>
+        </p:nvSpPr>
         <p:spPr>
           <a:xfrm>
-            <a:off x="944880" y="2647950"/>
-            <a:ext cx="11826240" cy="4619625"/>
+            <a:off x="2000250" y="2771775"/>
+            <a:ext cx="11029950" cy="539115"/>
           </a:xfrm>
           <a:prstGeom prst="rect">
             <a:avLst/>
           </a:prstGeom>
+          <a:noFill/>
           <a:ln>
             <a:noFill/>
           </a:ln>
         </p:spPr>
-      </p:pic>
+        <p:txBody>
+          <a:bodyPr wrap="none" lIns="0" tIns="0" rIns="0" bIns="0" anchor="t">
+            <a:noAutofit/>
+          </a:bodyPr>
+          <a:lstStyle/>
+          <a:p>
+            <a:pPr marL="0" indent="0">
+              <a:lnSpc>
+                <a:spcPts val="4095"/>
+              </a:lnSpc>
+              <a:spcAft>
+                <a:spcPts val="0"/>
+              </a:spcAft>
+              <a:buNone/>
+            </a:pPr>
+            <a:r>
+              <a:rPr lang="en-US" sz="3150" b="0">
+                <a:solidFill>
+                  <a:srgbClr val="F5F1E9"/>
+                </a:solidFill>
+                <a:latin typeface="Arial"/>
+                <a:ea typeface="Arial"/>
+                <a:cs typeface="Arial"/>
+              </a:rPr>
+              <a:t xml:space="preserve">Don't count what it cost you to build.</a:t>
+            </a:r>
+            <a:endParaRPr lang="en-US" sz="3150"/>
+          </a:p>
+        </p:txBody>
+      </p:sp>
       <p:sp>
         <p:nvSpPr>
           <p:cNvPr id="6" name="Text 6"/>
+          <p:cNvSpPr txBox="1"/>
+          <p:nvPr/>
+        </p:nvSpPr>
+        <p:spPr>
+          <a:xfrm>
+            <a:off x="685800" y="3558540"/>
+            <a:ext cx="904875" cy="476250"/>
+          </a:xfrm>
+          <a:prstGeom prst="rect">
+            <a:avLst/>
+          </a:prstGeom>
+          <a:noFill/>
+          <a:ln>
+            <a:noFill/>
+          </a:ln>
+        </p:spPr>
+        <p:txBody>
+          <a:bodyPr wrap="none" lIns="0" tIns="0" rIns="0" bIns="0" anchor="t">
+            <a:noAutofit/>
+          </a:bodyPr>
+          <a:lstStyle/>
+          <a:p>
+            <a:pPr marL="0" indent="0">
+              <a:lnSpc>
+                <a:spcPts val="2438"/>
+              </a:lnSpc>
+              <a:spcAft>
+                <a:spcPts val="0"/>
+              </a:spcAft>
+              <a:buNone/>
+            </a:pPr>
+            <a:r>
+              <a:rPr lang="en-US" sz="1875" b="0">
+                <a:solidFill>
+                  <a:srgbClr val="EFB45F"/>
+                </a:solidFill>
+                <a:latin typeface="Arial"/>
+                <a:ea typeface="Arial"/>
+                <a:cs typeface="Arial"/>
+              </a:rPr>
+              <a:t xml:space="preserve">02</a:t>
+            </a:r>
+            <a:endParaRPr lang="en-US" sz="1875"/>
+          </a:p>
+        </p:txBody>
+      </p:sp>
+      <p:sp>
+        <p:nvSpPr>
+          <p:cNvPr id="7" name="Text 7"/>
+          <p:cNvSpPr txBox="1"/>
+          <p:nvPr/>
+        </p:nvSpPr>
+        <p:spPr>
+          <a:xfrm>
+            <a:off x="2000250" y="3558540"/>
+            <a:ext cx="11029950" cy="539115"/>
+          </a:xfrm>
+          <a:prstGeom prst="rect">
+            <a:avLst/>
+          </a:prstGeom>
+          <a:noFill/>
+          <a:ln>
+            <a:noFill/>
+          </a:ln>
+        </p:spPr>
+        <p:txBody>
+          <a:bodyPr wrap="none" lIns="0" tIns="0" rIns="0" bIns="0" anchor="t">
+            <a:noAutofit/>
+          </a:bodyPr>
+          <a:lstStyle/>
+          <a:p>
+            <a:pPr marL="0" indent="0">
+              <a:lnSpc>
+                <a:spcPts val="4095"/>
+              </a:lnSpc>
+              <a:spcAft>
+                <a:spcPts val="0"/>
+              </a:spcAft>
+              <a:buNone/>
+            </a:pPr>
+            <a:r>
+              <a:rPr lang="en-US" sz="3150" b="0">
+                <a:solidFill>
+                  <a:srgbClr val="F5F1E9"/>
+                </a:solidFill>
+                <a:latin typeface="Arial"/>
+                <a:ea typeface="Arial"/>
+                <a:cs typeface="Arial"/>
+              </a:rPr>
+              <a:t xml:space="preserve">Count what it costs them to relearn.</a:t>
+            </a:r>
+            <a:endParaRPr lang="en-US" sz="3150"/>
+          </a:p>
+        </p:txBody>
+      </p:sp>
+      <p:sp>
+        <p:nvSpPr>
+          <p:cNvPr id="8" name="Text 8"/>
           <p:cNvSpPr txBox="1"/>
           <p:nvPr/>
         </p:nvSpPr>
@@ -8833,7 +9161,7 @@
                 <a:ea typeface="Arial"/>
                 <a:cs typeface="Arial"/>
               </a:rPr>
-              <a:t xml:space="preserve">Code Is Cheap. Judgment Is Expensive.</a:t>
+              <a:t xml:space="preserve">Turn Your Thinkin' Tokens Up to 11</a:t>
             </a:r>
             <a:endParaRPr lang="en-US" sz="975"/>
           </a:p>
@@ -8841,7 +9169,7 @@
       </p:sp>
       <p:sp>
         <p:nvSpPr>
-          <p:cNvPr id="7" name="Text 7"/>
+          <p:cNvPr id="9" name="Text 9"/>
           <p:cNvSpPr txBox="1"/>
           <p:nvPr/>
         </p:nvSpPr>
@@ -9013,7 +9341,7 @@
                 <a:ea typeface="Arial"/>
                 <a:cs typeface="Arial"/>
               </a:rPr>
-              <a:t xml:space="preserve">Point at the queue</a:t>
+              <a:t xml:space="preserve">What got cheap, and what didn't</a:t>
             </a:r>
             <a:endParaRPr lang="en-US" sz="3900"/>
           </a:p>
@@ -9111,7 +9439,7 @@
                 <a:ea typeface="Arial"/>
                 <a:cs typeface="Arial"/>
               </a:rPr>
-              <a:t xml:space="preserve">Idea → specification → code → review → release</a:t>
+              <a:t xml:space="preserve">Someone has to want it · build it · learn it</a:t>
             </a:r>
             <a:endParaRPr lang="en-US" sz="3150"/>
           </a:p>
@@ -9209,7 +9537,7 @@
                 <a:ea typeface="Arial"/>
                 <a:cs typeface="Arial"/>
               </a:rPr>
-              <a:t xml:space="preserve">Not where it takes skill. Where it sits untouched.</a:t>
+              <a:t xml:space="preserve">We only automated the middle one</a:t>
             </a:r>
             <a:endParaRPr lang="en-US" sz="3150"/>
           </a:p>
@@ -9258,7 +9586,7 @@
                 <a:ea typeface="Arial"/>
                 <a:cs typeface="Arial"/>
               </a:rPr>
-              <a:t xml:space="preserve">Code Is Cheap. Judgment Is Expensive.</a:t>
+              <a:t xml:space="preserve">Turn Your Thinkin' Tokens Up to 11</a:t>
             </a:r>
             <a:endParaRPr lang="en-US" sz="975"/>
           </a:p>
@@ -9438,7 +9766,7 @@
                 <a:ea typeface="Arial"/>
                 <a:cs typeface="Arial"/>
               </a:rPr>
-              <a:t xml:space="preserve">A queue does not care how you feel about it</a:t>
+              <a:t xml:space="preserve">Nobody lives in your app</a:t>
             </a:r>
             <a:endParaRPr lang="en-US" sz="3900"/>
           </a:p>
@@ -9468,7 +9796,7 @@
       </p:sp>
       <p:pic>
         <p:nvPicPr>
-          <p:cNvPr id="5" name="8de9aa7b0e58010a491d155d2a0aaafbe5d48c9d4da5759fad5af686b3fce993" descr="Kingman: queue wait vs reviewer utilization, variability factor one"/>
+          <p:cNvPr id="5" name="d8660a79939e120d919024243ba3cb1a23c85540bbaeb59d48641edc0ea48389" descr="Ninety days of releases against one user's four sessions"/>
           <p:cNvPicPr>
             <a:picLocks noChangeAspect="1"/>
           </p:cNvPicPr>
@@ -9542,7 +9870,7 @@
                 <a:ea typeface="Arial"/>
                 <a:cs typeface="Arial"/>
               </a:rPr>
-              <a:t xml:space="preserve">Code Is Cheap. Judgment Is Expensive.</a:t>
+              <a:t xml:space="preserve">Turn Your Thinkin' Tokens Up to 11</a:t>
             </a:r>
             <a:endParaRPr lang="en-US" sz="975"/>
           </a:p>
@@ -9722,7 +10050,7 @@
                 <a:ea typeface="Arial"/>
                 <a:cs typeface="Arial"/>
               </a:rPr>
-              <a:t xml:space="preserve">The stage you didn't speed up</a:t>
+              <a:t xml:space="preserve">Feature fatigue is a measured effect</a:t>
             </a:r>
             <a:endParaRPr lang="en-US" sz="3900"/>
           </a:p>
@@ -9820,7 +10148,7 @@
                 <a:ea typeface="Arial"/>
                 <a:cs typeface="Arial"/>
               </a:rPr>
-              <a:t xml:space="preserve">Fixed-work example: review is 30% of service time</a:t>
+              <a:t xml:space="preserve">Before use: capability wins</a:t>
             </a:r>
             <a:endParaRPr lang="en-US" sz="3150"/>
           </a:p>
@@ -9918,7 +10246,7 @@
                 <a:ea typeface="Arial"/>
                 <a:cs typeface="Arial"/>
               </a:rPr>
-              <a:t xml:space="preserve">Infinite generation speed → 1 / 0.30 = 3.33×</a:t>
+              <a:t xml:space="preserve">After use: usability wins</a:t>
             </a:r>
             <a:endParaRPr lang="en-US" sz="3150"/>
           </a:p>
@@ -9927,6 +10255,104 @@
       <p:sp>
         <p:nvSpPr>
           <p:cNvPr id="8" name="Text 8"/>
+          <p:cNvSpPr txBox="1"/>
+          <p:nvPr/>
+        </p:nvSpPr>
+        <p:spPr>
+          <a:xfrm>
+            <a:off x="685800" y="4345305"/>
+            <a:ext cx="904875" cy="476250"/>
+          </a:xfrm>
+          <a:prstGeom prst="rect">
+            <a:avLst/>
+          </a:prstGeom>
+          <a:noFill/>
+          <a:ln>
+            <a:noFill/>
+          </a:ln>
+        </p:spPr>
+        <p:txBody>
+          <a:bodyPr wrap="none" lIns="0" tIns="0" rIns="0" bIns="0" anchor="t">
+            <a:noAutofit/>
+          </a:bodyPr>
+          <a:lstStyle/>
+          <a:p>
+            <a:pPr marL="0" indent="0">
+              <a:lnSpc>
+                <a:spcPts val="2438"/>
+              </a:lnSpc>
+              <a:spcAft>
+                <a:spcPts val="0"/>
+              </a:spcAft>
+              <a:buNone/>
+            </a:pPr>
+            <a:r>
+              <a:rPr lang="en-US" sz="1875" b="0">
+                <a:solidFill>
+                  <a:srgbClr val="EFB45F"/>
+                </a:solidFill>
+                <a:latin typeface="Arial"/>
+                <a:ea typeface="Arial"/>
+                <a:cs typeface="Arial"/>
+              </a:rPr>
+              <a:t xml:space="preserve">03</a:t>
+            </a:r>
+            <a:endParaRPr lang="en-US" sz="1875"/>
+          </a:p>
+        </p:txBody>
+      </p:sp>
+      <p:sp>
+        <p:nvSpPr>
+          <p:cNvPr id="9" name="Text 9"/>
+          <p:cNvSpPr txBox="1"/>
+          <p:nvPr/>
+        </p:nvSpPr>
+        <p:spPr>
+          <a:xfrm>
+            <a:off x="2000250" y="4345305"/>
+            <a:ext cx="11029950" cy="539115"/>
+          </a:xfrm>
+          <a:prstGeom prst="rect">
+            <a:avLst/>
+          </a:prstGeom>
+          <a:noFill/>
+          <a:ln>
+            <a:noFill/>
+          </a:ln>
+        </p:spPr>
+        <p:txBody>
+          <a:bodyPr wrap="none" lIns="0" tIns="0" rIns="0" bIns="0" anchor="t">
+            <a:noAutofit/>
+          </a:bodyPr>
+          <a:lstStyle/>
+          <a:p>
+            <a:pPr marL="0" indent="0">
+              <a:lnSpc>
+                <a:spcPts val="4095"/>
+              </a:lnSpc>
+              <a:spcAft>
+                <a:spcPts val="0"/>
+              </a:spcAft>
+              <a:buNone/>
+            </a:pPr>
+            <a:r>
+              <a:rPr lang="en-US" sz="3150" b="0">
+                <a:solidFill>
+                  <a:srgbClr val="F5F1E9"/>
+                </a:solidFill>
+                <a:latin typeface="Arial"/>
+                <a:ea typeface="Arial"/>
+                <a:cs typeface="Arial"/>
+              </a:rPr>
+              <a:t xml:space="preserve">Delighters decay into expectations</a:t>
+            </a:r>
+            <a:endParaRPr lang="en-US" sz="3150"/>
+          </a:p>
+        </p:txBody>
+      </p:sp>
+      <p:sp>
+        <p:nvSpPr>
+          <p:cNvPr id="10" name="Text 10"/>
           <p:cNvSpPr txBox="1"/>
           <p:nvPr/>
         </p:nvSpPr>
@@ -9967,7 +10393,7 @@
                 <a:ea typeface="Arial"/>
                 <a:cs typeface="Arial"/>
               </a:rPr>
-              <a:t xml:space="preserve">Code Is Cheap. Judgment Is Expensive.</a:t>
+              <a:t xml:space="preserve">Turn Your Thinkin' Tokens Up to 11</a:t>
             </a:r>
             <a:endParaRPr lang="en-US" sz="975"/>
           </a:p>
@@ -9975,7 +10401,7 @@
       </p:sp>
       <p:sp>
         <p:nvSpPr>
-          <p:cNvPr id="9" name="Text 9"/>
+          <p:cNvPr id="11" name="Text 11"/>
           <p:cNvSpPr txBox="1"/>
           <p:nvPr/>
         </p:nvSpPr>
@@ -10147,7 +10573,7 @@
                 <a:ea typeface="Arial"/>
                 <a:cs typeface="Arial"/>
               </a:rPr>
-              <a:t xml:space="preserve">You cannot inspect quality in</a:t>
+              <a:t xml:space="preserve">A change is a loss before it is a gain</a:t>
             </a:r>
             <a:endParaRPr lang="en-US" sz="3900"/>
           </a:p>
@@ -10245,7 +10671,7 @@
                 <a:ea typeface="Arial"/>
                 <a:cs typeface="Arial"/>
               </a:rPr>
-              <a:t xml:space="preserve">Fewer arrivals. Smaller surprises.</a:t>
+              <a:t xml:space="preserve">Status quo bias · endowment effect</a:t>
             </a:r>
             <a:endParaRPr lang="en-US" sz="3150"/>
           </a:p>
@@ -10343,7 +10769,7 @@
                 <a:ea typeface="Arial"/>
                 <a:cs typeface="Arial"/>
               </a:rPr>
-              <a:t xml:space="preserve">Fix the process producing the queue.</a:t>
+              <a:t xml:space="preserve">Recognition, not recall</a:t>
             </a:r>
             <a:endParaRPr lang="en-US" sz="3150"/>
           </a:p>
@@ -10352,6 +10778,104 @@
       <p:sp>
         <p:nvSpPr>
           <p:cNvPr id="8" name="Text 8"/>
+          <p:cNvSpPr txBox="1"/>
+          <p:nvPr/>
+        </p:nvSpPr>
+        <p:spPr>
+          <a:xfrm>
+            <a:off x="685800" y="4345305"/>
+            <a:ext cx="904875" cy="476250"/>
+          </a:xfrm>
+          <a:prstGeom prst="rect">
+            <a:avLst/>
+          </a:prstGeom>
+          <a:noFill/>
+          <a:ln>
+            <a:noFill/>
+          </a:ln>
+        </p:spPr>
+        <p:txBody>
+          <a:bodyPr wrap="none" lIns="0" tIns="0" rIns="0" bIns="0" anchor="t">
+            <a:noAutofit/>
+          </a:bodyPr>
+          <a:lstStyle/>
+          <a:p>
+            <a:pPr marL="0" indent="0">
+              <a:lnSpc>
+                <a:spcPts val="2438"/>
+              </a:lnSpc>
+              <a:spcAft>
+                <a:spcPts val="0"/>
+              </a:spcAft>
+              <a:buNone/>
+            </a:pPr>
+            <a:r>
+              <a:rPr lang="en-US" sz="1875" b="0">
+                <a:solidFill>
+                  <a:srgbClr val="EFB45F"/>
+                </a:solidFill>
+                <a:latin typeface="Arial"/>
+                <a:ea typeface="Arial"/>
+                <a:cs typeface="Arial"/>
+              </a:rPr>
+              <a:t xml:space="preserve">03</a:t>
+            </a:r>
+            <a:endParaRPr lang="en-US" sz="1875"/>
+          </a:p>
+        </p:txBody>
+      </p:sp>
+      <p:sp>
+        <p:nvSpPr>
+          <p:cNvPr id="9" name="Text 9"/>
+          <p:cNvSpPr txBox="1"/>
+          <p:nvPr/>
+        </p:nvSpPr>
+        <p:spPr>
+          <a:xfrm>
+            <a:off x="2000250" y="4345305"/>
+            <a:ext cx="11029950" cy="539115"/>
+          </a:xfrm>
+          <a:prstGeom prst="rect">
+            <a:avLst/>
+          </a:prstGeom>
+          <a:noFill/>
+          <a:ln>
+            <a:noFill/>
+          </a:ln>
+        </p:spPr>
+        <p:txBody>
+          <a:bodyPr wrap="none" lIns="0" tIns="0" rIns="0" bIns="0" anchor="t">
+            <a:noAutofit/>
+          </a:bodyPr>
+          <a:lstStyle/>
+          <a:p>
+            <a:pPr marL="0" indent="0">
+              <a:lnSpc>
+                <a:spcPts val="4095"/>
+              </a:lnSpc>
+              <a:spcAft>
+                <a:spcPts val="0"/>
+              </a:spcAft>
+              <a:buNone/>
+            </a:pPr>
+            <a:r>
+              <a:rPr lang="en-US" sz="3150" b="0">
+                <a:solidFill>
+                  <a:srgbClr val="F5F1E9"/>
+                </a:solidFill>
+                <a:latin typeface="Arial"/>
+                <a:ea typeface="Arial"/>
+                <a:cs typeface="Arial"/>
+              </a:rPr>
+              <a:t xml:space="preserve">The gain is yours. The loss is theirs, today.</a:t>
+            </a:r>
+            <a:endParaRPr lang="en-US" sz="3150"/>
+          </a:p>
+        </p:txBody>
+      </p:sp>
+      <p:sp>
+        <p:nvSpPr>
+          <p:cNvPr id="10" name="Text 10"/>
           <p:cNvSpPr txBox="1"/>
           <p:nvPr/>
         </p:nvSpPr>
@@ -10392,7 +10916,7 @@
                 <a:ea typeface="Arial"/>
                 <a:cs typeface="Arial"/>
               </a:rPr>
-              <a:t xml:space="preserve">Code Is Cheap. Judgment Is Expensive.</a:t>
+              <a:t xml:space="preserve">Turn Your Thinkin' Tokens Up to 11</a:t>
             </a:r>
             <a:endParaRPr lang="en-US" sz="975"/>
           </a:p>
@@ -10400,7 +10924,7 @@
       </p:sp>
       <p:sp>
         <p:nvSpPr>
-          <p:cNvPr id="9" name="Text 9"/>
+          <p:cNvPr id="11" name="Text 11"/>
           <p:cNvSpPr txBox="1"/>
           <p:nvPr/>
         </p:nvSpPr>
@@ -10572,7 +11096,7 @@
                 <a:ea typeface="Arial"/>
                 <a:cs typeface="Arial"/>
               </a:rPr>
-              <a:t xml:space="preserve">"Add enterprise permissions"</a:t>
+              <a:t xml:space="preserve">"Ship it Tuesday"</a:t>
             </a:r>
             <a:endParaRPr lang="en-US" sz="3900"/>
           </a:p>
@@ -10670,7 +11194,7 @@
                 <a:ea typeface="Arial"/>
                 <a:cs typeface="Arial"/>
               </a:rPr>
-              <a:t xml:space="preserve">Who can do what, in which tenant?</a:t>
+              <a:t xml:space="preserve">"Ship it Tuesday."</a:t>
             </a:r>
             <a:endParaRPr lang="en-US" sz="3150"/>
           </a:p>
@@ -10768,7 +11292,7 @@
                 <a:ea typeface="Arial"/>
                 <a:cs typeface="Arial"/>
               </a:rPr>
-              <a:t xml:space="preserve">What happens when access changes?</a:t>
+              <a:t xml:space="preserve">That is the whole request.</a:t>
             </a:r>
             <a:endParaRPr lang="en-US" sz="3150"/>
           </a:p>
@@ -10777,104 +11301,6 @@
       <p:sp>
         <p:nvSpPr>
           <p:cNvPr id="8" name="Text 8"/>
-          <p:cNvSpPr txBox="1"/>
-          <p:nvPr/>
-        </p:nvSpPr>
-        <p:spPr>
-          <a:xfrm>
-            <a:off x="685800" y="4345305"/>
-            <a:ext cx="904875" cy="476250"/>
-          </a:xfrm>
-          <a:prstGeom prst="rect">
-            <a:avLst/>
-          </a:prstGeom>
-          <a:noFill/>
-          <a:ln>
-            <a:noFill/>
-          </a:ln>
-        </p:spPr>
-        <p:txBody>
-          <a:bodyPr wrap="none" lIns="0" tIns="0" rIns="0" bIns="0" anchor="t">
-            <a:noAutofit/>
-          </a:bodyPr>
-          <a:lstStyle/>
-          <a:p>
-            <a:pPr marL="0" indent="0">
-              <a:lnSpc>
-                <a:spcPts val="2438"/>
-              </a:lnSpc>
-              <a:spcAft>
-                <a:spcPts val="0"/>
-              </a:spcAft>
-              <a:buNone/>
-            </a:pPr>
-            <a:r>
-              <a:rPr lang="en-US" sz="1875" b="0">
-                <a:solidFill>
-                  <a:srgbClr val="EFB45F"/>
-                </a:solidFill>
-                <a:latin typeface="Arial"/>
-                <a:ea typeface="Arial"/>
-                <a:cs typeface="Arial"/>
-              </a:rPr>
-              <a:t xml:space="preserve">03</a:t>
-            </a:r>
-            <a:endParaRPr lang="en-US" sz="1875"/>
-          </a:p>
-        </p:txBody>
-      </p:sp>
-      <p:sp>
-        <p:nvSpPr>
-          <p:cNvPr id="9" name="Text 9"/>
-          <p:cNvSpPr txBox="1"/>
-          <p:nvPr/>
-        </p:nvSpPr>
-        <p:spPr>
-          <a:xfrm>
-            <a:off x="2000250" y="4345305"/>
-            <a:ext cx="11029950" cy="539115"/>
-          </a:xfrm>
-          <a:prstGeom prst="rect">
-            <a:avLst/>
-          </a:prstGeom>
-          <a:noFill/>
-          <a:ln>
-            <a:noFill/>
-          </a:ln>
-        </p:spPr>
-        <p:txBody>
-          <a:bodyPr wrap="none" lIns="0" tIns="0" rIns="0" bIns="0" anchor="t">
-            <a:noAutofit/>
-          </a:bodyPr>
-          <a:lstStyle/>
-          <a:p>
-            <a:pPr marL="0" indent="0">
-              <a:lnSpc>
-                <a:spcPts val="4095"/>
-              </a:lnSpc>
-              <a:spcAft>
-                <a:spcPts val="0"/>
-              </a:spcAft>
-              <a:buNone/>
-            </a:pPr>
-            <a:r>
-              <a:rPr lang="en-US" sz="3150" b="0">
-                <a:solidFill>
-                  <a:srgbClr val="F5F1E9"/>
-                </a:solidFill>
-                <a:latin typeface="Arial"/>
-                <a:ea typeface="Arial"/>
-                <a:cs typeface="Arial"/>
-              </a:rPr>
-              <a:t xml:space="preserve">What must never happen?</a:t>
-            </a:r>
-            <a:endParaRPr lang="en-US" sz="3150"/>
-          </a:p>
-        </p:txBody>
-      </p:sp>
-      <p:sp>
-        <p:nvSpPr>
-          <p:cNvPr id="10" name="Text 10"/>
           <p:cNvSpPr txBox="1"/>
           <p:nvPr/>
         </p:nvSpPr>
@@ -10915,7 +11341,7 @@
                 <a:ea typeface="Arial"/>
                 <a:cs typeface="Arial"/>
               </a:rPr>
-              <a:t xml:space="preserve">Code Is Cheap. Judgment Is Expensive.</a:t>
+              <a:t xml:space="preserve">Turn Your Thinkin' Tokens Up to 11</a:t>
             </a:r>
             <a:endParaRPr lang="en-US" sz="975"/>
           </a:p>
@@ -10923,7 +11349,7 @@
       </p:sp>
       <p:sp>
         <p:nvSpPr>
-          <p:cNvPr id="11" name="Text 11"/>
+          <p:cNvPr id="9" name="Text 9"/>
           <p:cNvSpPr txBox="1"/>
           <p:nvPr/>
         </p:nvSpPr>
@@ -11095,22 +11521,723 @@
                 <a:ea typeface="Arial"/>
                 <a:cs typeface="Arial"/>
               </a:rPr>
-              <a:t xml:space="preserve">A spec reduces variance</a:t>
+              <a:t xml:space="preserve">Five axes, one of them a date</a:t>
             </a:r>
             <a:endParaRPr lang="en-US" sz="3900"/>
           </a:p>
         </p:txBody>
       </p:sp>
+      <p:graphicFrame>
+        <p:nvGraphicFramePr>
+          <p:cNvPr id="4" name="Editable table"/>
+          <p:cNvGraphicFramePr/>
+          <p:nvPr/>
+        </p:nvGraphicFramePr>
+        <p:xfrm>
+          <a:off x="685800" y="2752725"/>
+          <a:ext cx="12344400" cy="3380423"/>
+        </p:xfrm>
+        <a:graphic>
+          <a:graphicData uri="http://schemas.openxmlformats.org/drawingml/2006/main/table">
+            <a:tbl>
+              <a:tblPr firstRow="1" bandRow="0"/>
+              <a:tblGrid>
+                <a:gridCol w="4114800"/>
+                <a:gridCol w="4114800"/>
+                <a:gridCol w="4114800"/>
+              </a:tblGrid>
+              <a:tr h="563404">
+                <a:tc>
+                  <a:txBody>
+                    <a:bodyPr wrap="none" lIns="0" tIns="0" rIns="0" bIns="0"/>
+                    <a:lstStyle/>
+                    <a:p>
+                      <a:pPr marL="0" indent="0">
+                        <a:lnSpc>
+                          <a:spcPts val="2936"/>
+                        </a:lnSpc>
+                        <a:spcAft>
+                          <a:spcPts val="0"/>
+                        </a:spcAft>
+                        <a:buNone/>
+                      </a:pPr>
+                      <a:r>
+                        <a:rPr lang="en-US" sz="2175" b="1">
+                          <a:solidFill>
+                            <a:srgbClr val="EFB45F"/>
+                          </a:solidFill>
+                          <a:latin typeface="Arial"/>
+                          <a:ea typeface="Arial"/>
+                          <a:cs typeface="Arial"/>
+                        </a:rPr>
+                        <a:t xml:space="preserve">Axis</a:t>
+                      </a:r>
+                      <a:endParaRPr lang="en-US" sz="2175"/>
+                    </a:p>
+                  </a:txBody>
+                  <a:tcPr marL="95250" marR="95250" marT="95250" marB="95250">
+                    <a:lnB w="6350">
+                      <a:solidFill>
+                        <a:srgbClr val="CBD2CF"/>
+                      </a:solidFill>
+                    </a:lnB>
+                    <a:noFill/>
+                  </a:tcPr>
+                </a:tc>
+                <a:tc>
+                  <a:txBody>
+                    <a:bodyPr wrap="none" lIns="0" tIns="0" rIns="0" bIns="0"/>
+                    <a:lstStyle/>
+                    <a:p>
+                      <a:pPr marL="0" indent="0">
+                        <a:lnSpc>
+                          <a:spcPts val="2936"/>
+                        </a:lnSpc>
+                        <a:spcAft>
+                          <a:spcPts val="0"/>
+                        </a:spcAft>
+                        <a:buNone/>
+                      </a:pPr>
+                      <a:r>
+                        <a:rPr lang="en-US" sz="2175" b="1">
+                          <a:solidFill>
+                            <a:srgbClr val="EFB45F"/>
+                          </a:solidFill>
+                          <a:latin typeface="Arial"/>
+                          <a:ea typeface="Arial"/>
+                          <a:cs typeface="Arial"/>
+                        </a:rPr>
+                        <a:t xml:space="preserve">Question</a:t>
+                      </a:r>
+                      <a:endParaRPr lang="en-US" sz="2175"/>
+                    </a:p>
+                  </a:txBody>
+                  <a:tcPr marL="95250" marR="95250" marT="95250" marB="95250">
+                    <a:lnB w="6350">
+                      <a:solidFill>
+                        <a:srgbClr val="CBD2CF"/>
+                      </a:solidFill>
+                    </a:lnB>
+                    <a:noFill/>
+                  </a:tcPr>
+                </a:tc>
+                <a:tc>
+                  <a:txBody>
+                    <a:bodyPr wrap="none" lIns="0" tIns="0" rIns="0" bIns="0"/>
+                    <a:lstStyle/>
+                    <a:p>
+                      <a:pPr marL="0" indent="0">
+                        <a:lnSpc>
+                          <a:spcPts val="2936"/>
+                        </a:lnSpc>
+                        <a:spcAft>
+                          <a:spcPts val="0"/>
+                        </a:spcAft>
+                        <a:buNone/>
+                      </a:pPr>
+                      <a:r>
+                        <a:rPr lang="en-US" sz="2175" b="1">
+                          <a:solidFill>
+                            <a:srgbClr val="EFB45F"/>
+                          </a:solidFill>
+                          <a:latin typeface="Arial"/>
+                          <a:ea typeface="Arial"/>
+                          <a:cs typeface="Arial"/>
+                        </a:rPr>
+                        <a:t xml:space="preserve">Commits</a:t>
+                      </a:r>
+                      <a:endParaRPr lang="en-US" sz="2175"/>
+                    </a:p>
+                  </a:txBody>
+                  <a:tcPr marL="95250" marR="95250" marT="95250" marB="95250">
+                    <a:lnB w="6350">
+                      <a:solidFill>
+                        <a:srgbClr val="CBD2CF"/>
+                      </a:solidFill>
+                    </a:lnB>
+                    <a:noFill/>
+                  </a:tcPr>
+                </a:tc>
+              </a:tr>
+              <a:tr h="563404">
+                <a:tc>
+                  <a:txBody>
+                    <a:bodyPr wrap="none" lIns="0" tIns="0" rIns="0" bIns="0"/>
+                    <a:lstStyle/>
+                    <a:p>
+                      <a:pPr marL="0" indent="0">
+                        <a:lnSpc>
+                          <a:spcPts val="2936"/>
+                        </a:lnSpc>
+                        <a:spcAft>
+                          <a:spcPts val="0"/>
+                        </a:spcAft>
+                        <a:buNone/>
+                      </a:pPr>
+                      <a:r>
+                        <a:rPr lang="en-US" sz="2175" b="0">
+                          <a:solidFill>
+                            <a:srgbClr val="F5F1E9"/>
+                          </a:solidFill>
+                          <a:latin typeface="Arial"/>
+                          <a:ea typeface="Arial"/>
+                          <a:cs typeface="Arial"/>
+                        </a:rPr>
+                        <a:t xml:space="preserve">What</a:t>
+                      </a:r>
+                      <a:endParaRPr lang="en-US" sz="2175"/>
+                    </a:p>
+                  </a:txBody>
+                  <a:tcPr marL="95250" marR="95250" marT="95250" marB="95250">
+                    <a:lnB w="6350">
+                      <a:solidFill>
+                        <a:srgbClr val="CBD2CF"/>
+                      </a:solidFill>
+                    </a:lnB>
+                    <a:noFill/>
+                  </a:tcPr>
+                </a:tc>
+                <a:tc>
+                  <a:txBody>
+                    <a:bodyPr wrap="none" lIns="0" tIns="0" rIns="0" bIns="0"/>
+                    <a:lstStyle/>
+                    <a:p>
+                      <a:pPr marL="0" indent="0">
+                        <a:lnSpc>
+                          <a:spcPts val="2936"/>
+                        </a:lnSpc>
+                        <a:spcAft>
+                          <a:spcPts val="0"/>
+                        </a:spcAft>
+                        <a:buNone/>
+                      </a:pPr>
+                      <a:r>
+                        <a:rPr lang="en-US" sz="2175" b="0">
+                          <a:solidFill>
+                            <a:srgbClr val="F5F1E9"/>
+                          </a:solidFill>
+                          <a:latin typeface="Arial"/>
+                          <a:ea typeface="Arial"/>
+                          <a:cs typeface="Arial"/>
+                        </a:rPr>
+                        <a:t xml:space="preserve">Should it exist at all?</a:t>
+                      </a:r>
+                      <a:endParaRPr lang="en-US" sz="2175"/>
+                    </a:p>
+                  </a:txBody>
+                  <a:tcPr marL="95250" marR="95250" marT="95250" marB="95250">
+                    <a:lnB w="6350">
+                      <a:solidFill>
+                        <a:srgbClr val="CBD2CF"/>
+                      </a:solidFill>
+                    </a:lnB>
+                    <a:noFill/>
+                  </a:tcPr>
+                </a:tc>
+                <a:tc>
+                  <a:txBody>
+                    <a:bodyPr wrap="none" lIns="0" tIns="0" rIns="0" bIns="0"/>
+                    <a:lstStyle/>
+                    <a:p>
+                      <a:pPr marL="0" indent="0">
+                        <a:lnSpc>
+                          <a:spcPts val="2936"/>
+                        </a:lnSpc>
+                        <a:spcAft>
+                          <a:spcPts val="0"/>
+                        </a:spcAft>
+                        <a:buNone/>
+                      </a:pPr>
+                      <a:r>
+                        <a:rPr lang="en-US" sz="2175" b="0">
+                          <a:solidFill>
+                            <a:srgbClr val="F5F1E9"/>
+                          </a:solidFill>
+                          <a:latin typeface="Arial"/>
+                          <a:ea typeface="Arial"/>
+                          <a:cs typeface="Arial"/>
+                        </a:rPr>
+                        <a:t xml:space="preserve">Docs, support surface</a:t>
+                      </a:r>
+                      <a:endParaRPr lang="en-US" sz="2175"/>
+                    </a:p>
+                  </a:txBody>
+                  <a:tcPr marL="95250" marR="95250" marT="95250" marB="95250">
+                    <a:lnB w="6350">
+                      <a:solidFill>
+                        <a:srgbClr val="CBD2CF"/>
+                      </a:solidFill>
+                    </a:lnB>
+                    <a:noFill/>
+                  </a:tcPr>
+                </a:tc>
+              </a:tr>
+              <a:tr h="563404">
+                <a:tc>
+                  <a:txBody>
+                    <a:bodyPr wrap="none" lIns="0" tIns="0" rIns="0" bIns="0"/>
+                    <a:lstStyle/>
+                    <a:p>
+                      <a:pPr marL="0" indent="0">
+                        <a:lnSpc>
+                          <a:spcPts val="2936"/>
+                        </a:lnSpc>
+                        <a:spcAft>
+                          <a:spcPts val="0"/>
+                        </a:spcAft>
+                        <a:buNone/>
+                      </a:pPr>
+                      <a:r>
+                        <a:rPr lang="en-US" sz="2175" b="0">
+                          <a:solidFill>
+                            <a:srgbClr val="F5F1E9"/>
+                          </a:solidFill>
+                          <a:latin typeface="Arial"/>
+                          <a:ea typeface="Arial"/>
+                          <a:cs typeface="Arial"/>
+                        </a:rPr>
+                        <a:t xml:space="preserve">Who</a:t>
+                      </a:r>
+                      <a:endParaRPr lang="en-US" sz="2175"/>
+                    </a:p>
+                  </a:txBody>
+                  <a:tcPr marL="95250" marR="95250" marT="95250" marB="95250">
+                    <a:lnB w="6350">
+                      <a:solidFill>
+                        <a:srgbClr val="CBD2CF"/>
+                      </a:solidFill>
+                    </a:lnB>
+                    <a:noFill/>
+                  </a:tcPr>
+                </a:tc>
+                <a:tc>
+                  <a:txBody>
+                    <a:bodyPr wrap="none" lIns="0" tIns="0" rIns="0" bIns="0"/>
+                    <a:lstStyle/>
+                    <a:p>
+                      <a:pPr marL="0" indent="0">
+                        <a:lnSpc>
+                          <a:spcPts val="2936"/>
+                        </a:lnSpc>
+                        <a:spcAft>
+                          <a:spcPts val="0"/>
+                        </a:spcAft>
+                        <a:buNone/>
+                      </a:pPr>
+                      <a:r>
+                        <a:rPr lang="en-US" sz="2175" b="0">
+                          <a:solidFill>
+                            <a:srgbClr val="F5F1E9"/>
+                          </a:solidFill>
+                          <a:latin typeface="Arial"/>
+                          <a:ea typeface="Arial"/>
+                          <a:cs typeface="Arial"/>
+                        </a:rPr>
+                        <a:t xml:space="preserve">Everyone, or a cohort?</a:t>
+                      </a:r>
+                      <a:endParaRPr lang="en-US" sz="2175"/>
+                    </a:p>
+                  </a:txBody>
+                  <a:tcPr marL="95250" marR="95250" marT="95250" marB="95250">
+                    <a:lnB w="6350">
+                      <a:solidFill>
+                        <a:srgbClr val="CBD2CF"/>
+                      </a:solidFill>
+                    </a:lnB>
+                    <a:noFill/>
+                  </a:tcPr>
+                </a:tc>
+                <a:tc>
+                  <a:txBody>
+                    <a:bodyPr wrap="none" lIns="0" tIns="0" rIns="0" bIns="0"/>
+                    <a:lstStyle/>
+                    <a:p>
+                      <a:pPr marL="0" indent="0">
+                        <a:lnSpc>
+                          <a:spcPts val="2936"/>
+                        </a:lnSpc>
+                        <a:spcAft>
+                          <a:spcPts val="0"/>
+                        </a:spcAft>
+                        <a:buNone/>
+                      </a:pPr>
+                      <a:r>
+                        <a:rPr lang="en-US" sz="2175" b="0">
+                          <a:solidFill>
+                            <a:srgbClr val="F5F1E9"/>
+                          </a:solidFill>
+                          <a:latin typeface="Arial"/>
+                          <a:ea typeface="Arial"/>
+                          <a:cs typeface="Arial"/>
+                        </a:rPr>
+                        <a:t xml:space="preserve">Sales, contracts</a:t>
+                      </a:r>
+                      <a:endParaRPr lang="en-US" sz="2175"/>
+                    </a:p>
+                  </a:txBody>
+                  <a:tcPr marL="95250" marR="95250" marT="95250" marB="95250">
+                    <a:lnB w="6350">
+                      <a:solidFill>
+                        <a:srgbClr val="CBD2CF"/>
+                      </a:solidFill>
+                    </a:lnB>
+                    <a:noFill/>
+                  </a:tcPr>
+                </a:tc>
+              </a:tr>
+              <a:tr h="563404">
+                <a:tc>
+                  <a:txBody>
+                    <a:bodyPr wrap="none" lIns="0" tIns="0" rIns="0" bIns="0"/>
+                    <a:lstStyle/>
+                    <a:p>
+                      <a:pPr marL="0" indent="0">
+                        <a:lnSpc>
+                          <a:spcPts val="2936"/>
+                        </a:lnSpc>
+                        <a:spcAft>
+                          <a:spcPts val="0"/>
+                        </a:spcAft>
+                        <a:buNone/>
+                      </a:pPr>
+                      <a:r>
+                        <a:rPr lang="en-US" sz="2175" b="0">
+                          <a:solidFill>
+                            <a:srgbClr val="F5F1E9"/>
+                          </a:solidFill>
+                          <a:latin typeface="Arial"/>
+                          <a:ea typeface="Arial"/>
+                          <a:cs typeface="Arial"/>
+                        </a:rPr>
+                        <a:t xml:space="preserve">When</a:t>
+                      </a:r>
+                      <a:endParaRPr lang="en-US" sz="2175"/>
+                    </a:p>
+                  </a:txBody>
+                  <a:tcPr marL="95250" marR="95250" marT="95250" marB="95250">
+                    <a:lnB w="6350">
+                      <a:solidFill>
+                        <a:srgbClr val="CBD2CF"/>
+                      </a:solidFill>
+                    </a:lnB>
+                    <a:noFill/>
+                  </a:tcPr>
+                </a:tc>
+                <a:tc>
+                  <a:txBody>
+                    <a:bodyPr wrap="none" lIns="0" tIns="0" rIns="0" bIns="0"/>
+                    <a:lstStyle/>
+                    <a:p>
+                      <a:pPr marL="0" indent="0">
+                        <a:lnSpc>
+                          <a:spcPts val="2936"/>
+                        </a:lnSpc>
+                        <a:spcAft>
+                          <a:spcPts val="0"/>
+                        </a:spcAft>
+                        <a:buNone/>
+                      </a:pPr>
+                      <a:r>
+                        <a:rPr lang="en-US" sz="2175" b="0">
+                          <a:solidFill>
+                            <a:srgbClr val="F5F1E9"/>
+                          </a:solidFill>
+                          <a:latin typeface="Arial"/>
+                          <a:ea typeface="Arial"/>
+                          <a:cs typeface="Arial"/>
+                        </a:rPr>
+                        <a:t xml:space="preserve">Tuesday, or next quarter?</a:t>
+                      </a:r>
+                      <a:endParaRPr lang="en-US" sz="2175"/>
+                    </a:p>
+                  </a:txBody>
+                  <a:tcPr marL="95250" marR="95250" marT="95250" marB="95250">
+                    <a:lnB w="6350">
+                      <a:solidFill>
+                        <a:srgbClr val="CBD2CF"/>
+                      </a:solidFill>
+                    </a:lnB>
+                    <a:noFill/>
+                  </a:tcPr>
+                </a:tc>
+                <a:tc>
+                  <a:txBody>
+                    <a:bodyPr wrap="none" lIns="0" tIns="0" rIns="0" bIns="0"/>
+                    <a:lstStyle/>
+                    <a:p>
+                      <a:pPr marL="0" indent="0">
+                        <a:lnSpc>
+                          <a:spcPts val="2936"/>
+                        </a:lnSpc>
+                        <a:spcAft>
+                          <a:spcPts val="0"/>
+                        </a:spcAft>
+                        <a:buNone/>
+                      </a:pPr>
+                      <a:r>
+                        <a:rPr lang="en-US" sz="2175" b="0">
+                          <a:solidFill>
+                            <a:srgbClr val="F5F1E9"/>
+                          </a:solidFill>
+                          <a:latin typeface="Arial"/>
+                          <a:ea typeface="Arial"/>
+                          <a:cs typeface="Arial"/>
+                        </a:rPr>
+                        <a:t xml:space="preserve">Marketing, renewals</a:t>
+                      </a:r>
+                      <a:endParaRPr lang="en-US" sz="2175"/>
+                    </a:p>
+                  </a:txBody>
+                  <a:tcPr marL="95250" marR="95250" marT="95250" marB="95250">
+                    <a:lnB w="6350">
+                      <a:solidFill>
+                        <a:srgbClr val="CBD2CF"/>
+                      </a:solidFill>
+                    </a:lnB>
+                    <a:noFill/>
+                  </a:tcPr>
+                </a:tc>
+              </a:tr>
+              <a:tr h="563404">
+                <a:tc>
+                  <a:txBody>
+                    <a:bodyPr wrap="none" lIns="0" tIns="0" rIns="0" bIns="0"/>
+                    <a:lstStyle/>
+                    <a:p>
+                      <a:pPr marL="0" indent="0">
+                        <a:lnSpc>
+                          <a:spcPts val="2936"/>
+                        </a:lnSpc>
+                        <a:spcAft>
+                          <a:spcPts val="0"/>
+                        </a:spcAft>
+                        <a:buNone/>
+                      </a:pPr>
+                      <a:r>
+                        <a:rPr lang="en-US" sz="2175" b="0">
+                          <a:solidFill>
+                            <a:srgbClr val="F5F1E9"/>
+                          </a:solidFill>
+                          <a:latin typeface="Arial"/>
+                          <a:ea typeface="Arial"/>
+                          <a:cs typeface="Arial"/>
+                        </a:rPr>
+                        <a:t xml:space="preserve">Shape</a:t>
+                      </a:r>
+                      <a:endParaRPr lang="en-US" sz="2175"/>
+                    </a:p>
+                  </a:txBody>
+                  <a:tcPr marL="95250" marR="95250" marT="95250" marB="95250">
+                    <a:lnB w="6350">
+                      <a:solidFill>
+                        <a:srgbClr val="CBD2CF"/>
+                      </a:solidFill>
+                    </a:lnB>
+                    <a:noFill/>
+                  </a:tcPr>
+                </a:tc>
+                <a:tc>
+                  <a:txBody>
+                    <a:bodyPr wrap="none" lIns="0" tIns="0" rIns="0" bIns="0"/>
+                    <a:lstStyle/>
+                    <a:p>
+                      <a:pPr marL="0" indent="0">
+                        <a:lnSpc>
+                          <a:spcPts val="2936"/>
+                        </a:lnSpc>
+                        <a:spcAft>
+                          <a:spcPts val="0"/>
+                        </a:spcAft>
+                        <a:buNone/>
+                      </a:pPr>
+                      <a:r>
+                        <a:rPr lang="en-US" sz="2175" b="0">
+                          <a:solidFill>
+                            <a:srgbClr val="F5F1E9"/>
+                          </a:solidFill>
+                          <a:latin typeface="Arial"/>
+                          <a:ea typeface="Arial"/>
+                          <a:cs typeface="Arial"/>
+                        </a:rPr>
+                        <a:t xml:space="preserve">One batch or rolling?</a:t>
+                      </a:r>
+                      <a:endParaRPr lang="en-US" sz="2175"/>
+                    </a:p>
+                  </a:txBody>
+                  <a:tcPr marL="95250" marR="95250" marT="95250" marB="95250">
+                    <a:lnB w="6350">
+                      <a:solidFill>
+                        <a:srgbClr val="CBD2CF"/>
+                      </a:solidFill>
+                    </a:lnB>
+                    <a:noFill/>
+                  </a:tcPr>
+                </a:tc>
+                <a:tc>
+                  <a:txBody>
+                    <a:bodyPr wrap="none" lIns="0" tIns="0" rIns="0" bIns="0"/>
+                    <a:lstStyle/>
+                    <a:p>
+                      <a:pPr marL="0" indent="0">
+                        <a:lnSpc>
+                          <a:spcPts val="2936"/>
+                        </a:lnSpc>
+                        <a:spcAft>
+                          <a:spcPts val="0"/>
+                        </a:spcAft>
+                        <a:buNone/>
+                      </a:pPr>
+                      <a:r>
+                        <a:rPr lang="en-US" sz="2175" b="0">
+                          <a:solidFill>
+                            <a:srgbClr val="F5F1E9"/>
+                          </a:solidFill>
+                          <a:latin typeface="Arial"/>
+                          <a:ea typeface="Arial"/>
+                          <a:cs typeface="Arial"/>
+                        </a:rPr>
+                        <a:t xml:space="preserve">Rollback, triage</a:t>
+                      </a:r>
+                      <a:endParaRPr lang="en-US" sz="2175"/>
+                    </a:p>
+                  </a:txBody>
+                  <a:tcPr marL="95250" marR="95250" marT="95250" marB="95250">
+                    <a:lnB w="6350">
+                      <a:solidFill>
+                        <a:srgbClr val="CBD2CF"/>
+                      </a:solidFill>
+                    </a:lnB>
+                    <a:noFill/>
+                  </a:tcPr>
+                </a:tc>
+              </a:tr>
+              <a:tr h="563404">
+                <a:tc>
+                  <a:txBody>
+                    <a:bodyPr wrap="none" lIns="0" tIns="0" rIns="0" bIns="0"/>
+                    <a:lstStyle/>
+                    <a:p>
+                      <a:pPr marL="0" indent="0">
+                        <a:lnSpc>
+                          <a:spcPts val="2936"/>
+                        </a:lnSpc>
+                        <a:spcAft>
+                          <a:spcPts val="0"/>
+                        </a:spcAft>
+                        <a:buNone/>
+                      </a:pPr>
+                      <a:r>
+                        <a:rPr lang="en-US" sz="2175" b="0">
+                          <a:solidFill>
+                            <a:srgbClr val="F5F1E9"/>
+                          </a:solidFill>
+                          <a:latin typeface="Arial"/>
+                          <a:ea typeface="Arial"/>
+                          <a:cs typeface="Arial"/>
+                        </a:rPr>
+                        <a:t xml:space="preserve">Reversible</a:t>
+                      </a:r>
+                      <a:endParaRPr lang="en-US" sz="2175"/>
+                    </a:p>
+                  </a:txBody>
+                  <a:tcPr marL="95250" marR="95250" marT="95250" marB="95250">
+                    <a:lnB w="6350">
+                      <a:solidFill>
+                        <a:srgbClr val="CBD2CF"/>
+                      </a:solidFill>
+                    </a:lnB>
+                    <a:noFill/>
+                  </a:tcPr>
+                </a:tc>
+                <a:tc>
+                  <a:txBody>
+                    <a:bodyPr wrap="none" lIns="0" tIns="0" rIns="0" bIns="0"/>
+                    <a:lstStyle/>
+                    <a:p>
+                      <a:pPr marL="0" indent="0">
+                        <a:lnSpc>
+                          <a:spcPts val="2936"/>
+                        </a:lnSpc>
+                        <a:spcAft>
+                          <a:spcPts val="0"/>
+                        </a:spcAft>
+                        <a:buNone/>
+                      </a:pPr>
+                      <a:r>
+                        <a:rPr lang="en-US" sz="2175" b="0">
+                          <a:solidFill>
+                            <a:srgbClr val="F5F1E9"/>
+                          </a:solidFill>
+                          <a:latin typeface="Arial"/>
+                          <a:ea typeface="Arial"/>
+                          <a:cs typeface="Arial"/>
+                        </a:rPr>
+                        <a:t xml:space="preserve">Flag, migration, one-way?</a:t>
+                      </a:r>
+                      <a:endParaRPr lang="en-US" sz="2175"/>
+                    </a:p>
+                  </a:txBody>
+                  <a:tcPr marL="95250" marR="95250" marT="95250" marB="95250">
+                    <a:lnB w="6350">
+                      <a:solidFill>
+                        <a:srgbClr val="CBD2CF"/>
+                      </a:solidFill>
+                    </a:lnB>
+                    <a:noFill/>
+                  </a:tcPr>
+                </a:tc>
+                <a:tc>
+                  <a:txBody>
+                    <a:bodyPr wrap="none" lIns="0" tIns="0" rIns="0" bIns="0"/>
+                    <a:lstStyle/>
+                    <a:p>
+                      <a:pPr marL="0" indent="0">
+                        <a:lnSpc>
+                          <a:spcPts val="2936"/>
+                        </a:lnSpc>
+                        <a:spcAft>
+                          <a:spcPts val="0"/>
+                        </a:spcAft>
+                        <a:buNone/>
+                      </a:pPr>
+                      <a:r>
+                        <a:rPr lang="en-US" sz="2175" b="0">
+                          <a:solidFill>
+                            <a:srgbClr val="F5F1E9"/>
+                          </a:solidFill>
+                          <a:latin typeface="Arial"/>
+                          <a:ea typeface="Arial"/>
+                          <a:cs typeface="Arial"/>
+                        </a:rPr>
+                        <a:t xml:space="preserve">On-call, data model</a:t>
+                      </a:r>
+                      <a:endParaRPr lang="en-US" sz="2175"/>
+                    </a:p>
+                  </a:txBody>
+                  <a:tcPr marL="95250" marR="95250" marT="95250" marB="95250">
+                    <a:lnB w="6350">
+                      <a:solidFill>
+                        <a:srgbClr val="CBD2CF"/>
+                      </a:solidFill>
+                    </a:lnB>
+                    <a:noFill/>
+                  </a:tcPr>
+                </a:tc>
+              </a:tr>
+            </a:tbl>
+          </a:graphicData>
+        </a:graphic>
+      </p:graphicFrame>
       <p:sp>
         <p:nvSpPr>
-          <p:cNvPr id="4" name="Text 4"/>
+          <p:cNvPr id="5" name="Text 5"/>
           <p:cNvSpPr txBox="1"/>
           <p:nvPr/>
         </p:nvSpPr>
         <p:spPr>
           <a:xfrm>
-            <a:off x="685800" y="2771775"/>
-            <a:ext cx="904875" cy="476250"/>
+            <a:off x="685800" y="6333173"/>
+            <a:ext cx="12344400" cy="1524000"/>
           </a:xfrm>
           <a:prstGeom prst="rect">
             <a:avLst/>
@@ -11128,15 +12255,15 @@
           <a:p>
             <a:pPr marL="0" indent="0">
               <a:lnSpc>
-                <a:spcPts val="2438"/>
-              </a:lnSpc>
-              <a:spcAft>
-                <a:spcPts val="0"/>
-              </a:spcAft>
-              <a:buNone/>
-            </a:pPr>
-            <a:r>
-              <a:rPr lang="en-US" sz="1875" b="0">
+                <a:spcPts val="2700"/>
+              </a:lnSpc>
+              <a:spcAft>
+                <a:spcPts val="0"/>
+              </a:spcAft>
+              <a:buNone/>
+            </a:pPr>
+            <a:r>
+              <a:rPr lang="en-US" sz="2025" b="0">
                 <a:solidFill>
                   <a:srgbClr val="EFB45F"/>
                 </a:solidFill>
@@ -11144,260 +12271,38 @@
                 <a:ea typeface="Arial"/>
                 <a:cs typeface="Arial"/>
               </a:rPr>
-              <a:t xml:space="preserve">01</a:t>
-            </a:r>
-            <a:endParaRPr lang="en-US" sz="1875"/>
-          </a:p>
-        </p:txBody>
-      </p:sp>
-      <p:sp>
-        <p:nvSpPr>
-          <p:cNvPr id="5" name="Text 5"/>
-          <p:cNvSpPr txBox="1"/>
-          <p:nvPr/>
-        </p:nvSpPr>
-        <p:spPr>
-          <a:xfrm>
-            <a:off x="2000250" y="2771775"/>
-            <a:ext cx="11029950" cy="539115"/>
-          </a:xfrm>
-          <a:prstGeom prst="rect">
-            <a:avLst/>
-          </a:prstGeom>
-          <a:noFill/>
-          <a:ln>
-            <a:noFill/>
-          </a:ln>
-        </p:spPr>
-        <p:txBody>
-          <a:bodyPr wrap="none" lIns="0" tIns="0" rIns="0" bIns="0" anchor="t">
-            <a:noAutofit/>
-          </a:bodyPr>
-          <a:lstStyle/>
-          <a:p>
-            <a:pPr marL="0" indent="0">
-              <a:lnSpc>
-                <a:spcPts val="4095"/>
-              </a:lnSpc>
-              <a:spcAft>
-                <a:spcPts val="0"/>
-              </a:spcAft>
-              <a:buNone/>
-            </a:pPr>
-            <a:r>
-              <a:rPr lang="en-US" sz="3150" b="0">
-                <a:solidFill>
-                  <a:srgbClr val="F5F1E9"/>
-                </a:solidFill>
-                <a:latin typeface="Arial"/>
-                <a:ea typeface="Arial"/>
-                <a:cs typeface="Arial"/>
-              </a:rPr>
-              <a:t xml:space="preserve">Actor + tenant + action + resource</a:t>
-            </a:r>
-            <a:endParaRPr lang="en-US" sz="3150"/>
+              <a:t xml:space="preserve">What · who · when · shape · reversibility</a:t>
+            </a:r>
+            <a:endParaRPr lang="en-US" sz="2025"/>
+          </a:p>
+          <a:p>
+            <a:pPr marL="0" indent="0">
+              <a:lnSpc>
+                <a:spcPts val="2700"/>
+              </a:lnSpc>
+              <a:spcAft>
+                <a:spcPts val="0"/>
+              </a:spcAft>
+              <a:buNone/>
+            </a:pPr>
+            <a:r>
+              <a:rPr lang="en-US" sz="2025" b="0">
+                <a:solidFill>
+                  <a:srgbClr val="EFB45F"/>
+                </a:solidFill>
+                <a:latin typeface="Arial"/>
+                <a:ea typeface="Arial"/>
+                <a:cs typeface="Arial"/>
+              </a:rPr>
+              <a:t xml:space="preserve">Every axis commits somebody who is not in this room</a:t>
+            </a:r>
+            <a:endParaRPr lang="en-US" sz="2025"/>
           </a:p>
         </p:txBody>
       </p:sp>
       <p:sp>
         <p:nvSpPr>
           <p:cNvPr id="6" name="Text 6"/>
-          <p:cNvSpPr txBox="1"/>
-          <p:nvPr/>
-        </p:nvSpPr>
-        <p:spPr>
-          <a:xfrm>
-            <a:off x="685800" y="3558540"/>
-            <a:ext cx="904875" cy="476250"/>
-          </a:xfrm>
-          <a:prstGeom prst="rect">
-            <a:avLst/>
-          </a:prstGeom>
-          <a:noFill/>
-          <a:ln>
-            <a:noFill/>
-          </a:ln>
-        </p:spPr>
-        <p:txBody>
-          <a:bodyPr wrap="none" lIns="0" tIns="0" rIns="0" bIns="0" anchor="t">
-            <a:noAutofit/>
-          </a:bodyPr>
-          <a:lstStyle/>
-          <a:p>
-            <a:pPr marL="0" indent="0">
-              <a:lnSpc>
-                <a:spcPts val="2438"/>
-              </a:lnSpc>
-              <a:spcAft>
-                <a:spcPts val="0"/>
-              </a:spcAft>
-              <a:buNone/>
-            </a:pPr>
-            <a:r>
-              <a:rPr lang="en-US" sz="1875" b="0">
-                <a:solidFill>
-                  <a:srgbClr val="EFB45F"/>
-                </a:solidFill>
-                <a:latin typeface="Arial"/>
-                <a:ea typeface="Arial"/>
-                <a:cs typeface="Arial"/>
-              </a:rPr>
-              <a:t xml:space="preserve">02</a:t>
-            </a:r>
-            <a:endParaRPr lang="en-US" sz="1875"/>
-          </a:p>
-        </p:txBody>
-      </p:sp>
-      <p:sp>
-        <p:nvSpPr>
-          <p:cNvPr id="7" name="Text 7"/>
-          <p:cNvSpPr txBox="1"/>
-          <p:nvPr/>
-        </p:nvSpPr>
-        <p:spPr>
-          <a:xfrm>
-            <a:off x="2000250" y="3558540"/>
-            <a:ext cx="11029950" cy="539115"/>
-          </a:xfrm>
-          <a:prstGeom prst="rect">
-            <a:avLst/>
-          </a:prstGeom>
-          <a:noFill/>
-          <a:ln>
-            <a:noFill/>
-          </a:ln>
-        </p:spPr>
-        <p:txBody>
-          <a:bodyPr wrap="none" lIns="0" tIns="0" rIns="0" bIns="0" anchor="t">
-            <a:noAutofit/>
-          </a:bodyPr>
-          <a:lstStyle/>
-          <a:p>
-            <a:pPr marL="0" indent="0">
-              <a:lnSpc>
-                <a:spcPts val="4095"/>
-              </a:lnSpc>
-              <a:spcAft>
-                <a:spcPts val="0"/>
-              </a:spcAft>
-              <a:buNone/>
-            </a:pPr>
-            <a:r>
-              <a:rPr lang="en-US" sz="3150" b="0">
-                <a:solidFill>
-                  <a:srgbClr val="F5F1E9"/>
-                </a:solidFill>
-                <a:latin typeface="Arial"/>
-                <a:ea typeface="Arial"/>
-                <a:cs typeface="Arial"/>
-              </a:rPr>
-              <a:t xml:space="preserve">Revocation changes the next decision</a:t>
-            </a:r>
-            <a:endParaRPr lang="en-US" sz="3150"/>
-          </a:p>
-        </p:txBody>
-      </p:sp>
-      <p:sp>
-        <p:nvSpPr>
-          <p:cNvPr id="8" name="Text 8"/>
-          <p:cNvSpPr txBox="1"/>
-          <p:nvPr/>
-        </p:nvSpPr>
-        <p:spPr>
-          <a:xfrm>
-            <a:off x="685800" y="4345305"/>
-            <a:ext cx="904875" cy="476250"/>
-          </a:xfrm>
-          <a:prstGeom prst="rect">
-            <a:avLst/>
-          </a:prstGeom>
-          <a:noFill/>
-          <a:ln>
-            <a:noFill/>
-          </a:ln>
-        </p:spPr>
-        <p:txBody>
-          <a:bodyPr wrap="none" lIns="0" tIns="0" rIns="0" bIns="0" anchor="t">
-            <a:noAutofit/>
-          </a:bodyPr>
-          <a:lstStyle/>
-          <a:p>
-            <a:pPr marL="0" indent="0">
-              <a:lnSpc>
-                <a:spcPts val="2438"/>
-              </a:lnSpc>
-              <a:spcAft>
-                <a:spcPts val="0"/>
-              </a:spcAft>
-              <a:buNone/>
-            </a:pPr>
-            <a:r>
-              <a:rPr lang="en-US" sz="1875" b="0">
-                <a:solidFill>
-                  <a:srgbClr val="EFB45F"/>
-                </a:solidFill>
-                <a:latin typeface="Arial"/>
-                <a:ea typeface="Arial"/>
-                <a:cs typeface="Arial"/>
-              </a:rPr>
-              <a:t xml:space="preserve">03</a:t>
-            </a:r>
-            <a:endParaRPr lang="en-US" sz="1875"/>
-          </a:p>
-        </p:txBody>
-      </p:sp>
-      <p:sp>
-        <p:nvSpPr>
-          <p:cNvPr id="9" name="Text 9"/>
-          <p:cNvSpPr txBox="1"/>
-          <p:nvPr/>
-        </p:nvSpPr>
-        <p:spPr>
-          <a:xfrm>
-            <a:off x="2000250" y="4345305"/>
-            <a:ext cx="11029950" cy="539115"/>
-          </a:xfrm>
-          <a:prstGeom prst="rect">
-            <a:avLst/>
-          </a:prstGeom>
-          <a:noFill/>
-          <a:ln>
-            <a:noFill/>
-          </a:ln>
-        </p:spPr>
-        <p:txBody>
-          <a:bodyPr wrap="none" lIns="0" tIns="0" rIns="0" bIns="0" anchor="t">
-            <a:noAutofit/>
-          </a:bodyPr>
-          <a:lstStyle/>
-          <a:p>
-            <a:pPr marL="0" indent="0">
-              <a:lnSpc>
-                <a:spcPts val="4095"/>
-              </a:lnSpc>
-              <a:spcAft>
-                <a:spcPts val="0"/>
-              </a:spcAft>
-              <a:buNone/>
-            </a:pPr>
-            <a:r>
-              <a:rPr lang="en-US" sz="3150" b="0">
-                <a:solidFill>
-                  <a:srgbClr val="F5F1E9"/>
-                </a:solidFill>
-                <a:latin typeface="Arial"/>
-                <a:ea typeface="Arial"/>
-                <a:cs typeface="Arial"/>
-              </a:rPr>
-              <a:t xml:space="preserve">Denied actions leave state unchanged</a:t>
-            </a:r>
-            <a:endParaRPr lang="en-US" sz="3150"/>
-          </a:p>
-        </p:txBody>
-      </p:sp>
-      <p:sp>
-        <p:nvSpPr>
-          <p:cNvPr id="10" name="Text 10"/>
           <p:cNvSpPr txBox="1"/>
           <p:nvPr/>
         </p:nvSpPr>
@@ -11438,7 +12343,7 @@
                 <a:ea typeface="Arial"/>
                 <a:cs typeface="Arial"/>
               </a:rPr>
-              <a:t xml:space="preserve">Code Is Cheap. Judgment Is Expensive.</a:t>
+              <a:t xml:space="preserve">Turn Your Thinkin' Tokens Up to 11</a:t>
             </a:r>
             <a:endParaRPr lang="en-US" sz="975"/>
           </a:p>
@@ -11446,7 +12351,7 @@
       </p:sp>
       <p:sp>
         <p:nvSpPr>
-          <p:cNvPr id="11" name="Text 11"/>
+          <p:cNvPr id="7" name="Text 7"/>
           <p:cNvSpPr txBox="1"/>
           <p:nvPr/>
         </p:nvSpPr>
@@ -11618,7 +12523,7 @@
                 <a:ea typeface="Arial"/>
                 <a:cs typeface="Arial"/>
               </a:rPr>
-              <a:t xml:space="preserve">What review actually catches</a:t>
+              <a:t xml:space="preserve">Turn the tokens up</a:t>
             </a:r>
             <a:endParaRPr lang="en-US" sz="3900"/>
           </a:p>
@@ -11716,7 +12621,7 @@
                 <a:ea typeface="Arial"/>
                 <a:cs typeface="Arial"/>
               </a:rPr>
-              <a:t xml:space="preserve">Understanding is work</a:t>
+              <a:t xml:space="preserve">6 features · 3 cohorts → 524,880 plans</a:t>
             </a:r>
             <a:endParaRPr lang="en-US" sz="3150"/>
           </a:p>
@@ -11780,7 +12685,7 @@
         <p:spPr>
           <a:xfrm>
             <a:off x="2000250" y="3558540"/>
-            <a:ext cx="11029950" cy="1059180"/>
+            <a:ext cx="11029950" cy="539115"/>
           </a:xfrm>
           <a:prstGeom prst="rect">
             <a:avLst/>
@@ -11814,30 +12719,7 @@
                 <a:ea typeface="Arial"/>
                 <a:cs typeface="Arial"/>
               </a:rPr>
-              <a:t xml:space="preserve">Defect finding · knowledge transfer · alternative</a:t>
-            </a:r>
-            <a:endParaRPr lang="en-US" sz="3150"/>
-          </a:p>
-          <a:p>
-            <a:pPr marL="0" indent="0">
-              <a:lnSpc>
-                <a:spcPts val="4095"/>
-              </a:lnSpc>
-              <a:spcAft>
-                <a:spcPts val="0"/>
-              </a:spcAft>
-              <a:buNone/>
-            </a:pPr>
-            <a:r>
-              <a:rPr lang="en-US" sz="3150" b="0">
-                <a:solidFill>
-                  <a:srgbClr val="F5F1E9"/>
-                </a:solidFill>
-                <a:latin typeface="Arial"/>
-                <a:ea typeface="Arial"/>
-                <a:cs typeface="Arial"/>
-              </a:rPr>
-              <a:t xml:space="preserve">designs</a:t>
+              <a:t xml:space="preserve">12,000 weekly actives · 4 weeks → 16 arms</a:t>
             </a:r>
             <a:endParaRPr lang="en-US" sz="3150"/>
           </a:p>
@@ -11846,6 +12728,104 @@
       <p:sp>
         <p:nvSpPr>
           <p:cNvPr id="8" name="Text 8"/>
+          <p:cNvSpPr txBox="1"/>
+          <p:nvPr/>
+        </p:nvSpPr>
+        <p:spPr>
+          <a:xfrm>
+            <a:off x="685800" y="4345305"/>
+            <a:ext cx="904875" cy="476250"/>
+          </a:xfrm>
+          <a:prstGeom prst="rect">
+            <a:avLst/>
+          </a:prstGeom>
+          <a:noFill/>
+          <a:ln>
+            <a:noFill/>
+          </a:ln>
+        </p:spPr>
+        <p:txBody>
+          <a:bodyPr wrap="none" lIns="0" tIns="0" rIns="0" bIns="0" anchor="t">
+            <a:noAutofit/>
+          </a:bodyPr>
+          <a:lstStyle/>
+          <a:p>
+            <a:pPr marL="0" indent="0">
+              <a:lnSpc>
+                <a:spcPts val="2438"/>
+              </a:lnSpc>
+              <a:spcAft>
+                <a:spcPts val="0"/>
+              </a:spcAft>
+              <a:buNone/>
+            </a:pPr>
+            <a:r>
+              <a:rPr lang="en-US" sz="1875" b="0">
+                <a:solidFill>
+                  <a:srgbClr val="EFB45F"/>
+                </a:solidFill>
+                <a:latin typeface="Arial"/>
+                <a:ea typeface="Arial"/>
+                <a:cs typeface="Arial"/>
+              </a:rPr>
+              <a:t xml:space="preserve">03</a:t>
+            </a:r>
+            <a:endParaRPr lang="en-US" sz="1875"/>
+          </a:p>
+        </p:txBody>
+      </p:sp>
+      <p:sp>
+        <p:nvSpPr>
+          <p:cNvPr id="9" name="Text 9"/>
+          <p:cNvSpPr txBox="1"/>
+          <p:nvPr/>
+        </p:nvSpPr>
+        <p:spPr>
+          <a:xfrm>
+            <a:off x="2000250" y="4345305"/>
+            <a:ext cx="11029950" cy="539115"/>
+          </a:xfrm>
+          <a:prstGeom prst="rect">
+            <a:avLst/>
+          </a:prstGeom>
+          <a:noFill/>
+          <a:ln>
+            <a:noFill/>
+          </a:ln>
+        </p:spPr>
+        <p:txBody>
+          <a:bodyPr wrap="none" lIns="0" tIns="0" rIns="0" bIns="0" anchor="t">
+            <a:noAutofit/>
+          </a:bodyPr>
+          <a:lstStyle/>
+          <a:p>
+            <a:pPr marL="0" indent="0">
+              <a:lnSpc>
+                <a:spcPts val="4095"/>
+              </a:lnSpc>
+              <a:spcAft>
+                <a:spcPts val="0"/>
+              </a:spcAft>
+              <a:buNone/>
+            </a:pPr>
+            <a:r>
+              <a:rPr lang="en-US" sz="3150" b="0">
+                <a:solidFill>
+                  <a:srgbClr val="F5F1E9"/>
+                </a:solidFill>
+                <a:latin typeface="Arial"/>
+                <a:ea typeface="Arial"/>
+                <a:cs typeface="Arial"/>
+              </a:rPr>
+              <a:t xml:space="preserve">32,805 plans per arm of evidence</a:t>
+            </a:r>
+            <a:endParaRPr lang="en-US" sz="3150"/>
+          </a:p>
+        </p:txBody>
+      </p:sp>
+      <p:sp>
+        <p:nvSpPr>
+          <p:cNvPr id="10" name="Text 10"/>
           <p:cNvSpPr txBox="1"/>
           <p:nvPr/>
         </p:nvSpPr>
@@ -11886,7 +12866,7 @@
                 <a:ea typeface="Arial"/>
                 <a:cs typeface="Arial"/>
               </a:rPr>
-              <a:t xml:space="preserve">Code Is Cheap. Judgment Is Expensive.</a:t>
+              <a:t xml:space="preserve">Turn Your Thinkin' Tokens Up to 11</a:t>
             </a:r>
             <a:endParaRPr lang="en-US" sz="975"/>
           </a:p>
@@ -11894,7 +12874,7 @@
       </p:sp>
       <p:sp>
         <p:nvSpPr>
-          <p:cNvPr id="9" name="Text 9"/>
+          <p:cNvPr id="11" name="Text 11"/>
           <p:cNvSpPr txBox="1"/>
           <p:nvPr/>
         </p:nvSpPr>
@@ -12066,7 +13046,7 @@
                 <a:ea typeface="Arial"/>
                 <a:cs typeface="Arial"/>
               </a:rPr>
-              <a:t xml:space="preserve">Demo: the rubber stamp</a:t>
+              <a:t xml:space="preserve">What the machine is actually for</a:t>
             </a:r>
             <a:endParaRPr lang="en-US" sz="3900"/>
           </a:p>
@@ -12130,7 +13110,7 @@
         <p:spPr>
           <a:xfrm>
             <a:off x="2000250" y="2771775"/>
-            <a:ext cx="11029950" cy="1059180"/>
+            <a:ext cx="11029950" cy="539115"/>
           </a:xfrm>
           <a:prstGeom prst="rect">
             <a:avLst/>
@@ -12164,30 +13144,7 @@
                 <a:ea typeface="Arial"/>
                 <a:cs typeface="Arial"/>
               </a:rPr>
-              <a:t xml:space="preserve">canEdit(user, resourceTenant) =</a:t>
-            </a:r>
-            <a:endParaRPr lang="en-US" sz="3150"/>
-          </a:p>
-          <a:p>
-            <a:pPr marL="0" indent="0">
-              <a:lnSpc>
-                <a:spcPts val="4095"/>
-              </a:lnSpc>
-              <a:spcAft>
-                <a:spcPts val="0"/>
-              </a:spcAft>
-              <a:buNone/>
-            </a:pPr>
-            <a:r>
-              <a:rPr lang="en-US" sz="3150" b="0">
-                <a:solidFill>
-                  <a:srgbClr val="F5F1E9"/>
-                </a:solidFill>
-                <a:latin typeface="Arial"/>
-                <a:ea typeface="Arial"/>
-                <a:cs typeface="Arial"/>
-              </a:rPr>
-              <a:t xml:space="preserve">user.roles.includes("admin")</a:t>
+              <a:t xml:space="preserve">Cluster 4,000 support threads → yes</a:t>
             </a:r>
             <a:endParaRPr lang="en-US" sz="3150"/>
           </a:p>
@@ -12201,7 +13158,7 @@
         </p:nvSpPr>
         <p:spPr>
           <a:xfrm>
-            <a:off x="685800" y="4078605"/>
+            <a:off x="685800" y="3558540"/>
             <a:ext cx="904875" cy="476250"/>
           </a:xfrm>
           <a:prstGeom prst="rect">
@@ -12250,7 +13207,7 @@
         </p:nvSpPr>
         <p:spPr>
           <a:xfrm>
-            <a:off x="2000250" y="4078605"/>
+            <a:off x="2000250" y="3558540"/>
             <a:ext cx="11029950" cy="539115"/>
           </a:xfrm>
           <a:prstGeom prst="rect">
@@ -12285,7 +13242,7 @@
                 <a:ea typeface="Arial"/>
                 <a:cs typeface="Arial"/>
               </a:rPr>
-              <a:t xml:space="preserve">Test: admin user → allowed</a:t>
+              <a:t xml:space="preserve">Choose the order → no</a:t>
             </a:r>
             <a:endParaRPr lang="en-US" sz="3150"/>
           </a:p>
@@ -12299,7 +13256,7 @@
         </p:nvSpPr>
         <p:spPr>
           <a:xfrm>
-            <a:off x="685800" y="4865370"/>
+            <a:off x="685800" y="4345305"/>
             <a:ext cx="904875" cy="476250"/>
           </a:xfrm>
           <a:prstGeom prst="rect">
@@ -12348,7 +13305,7 @@
         </p:nvSpPr>
         <p:spPr>
           <a:xfrm>
-            <a:off x="2000250" y="4865370"/>
+            <a:off x="2000250" y="4345305"/>
             <a:ext cx="11029950" cy="539115"/>
           </a:xfrm>
           <a:prstGeom prst="rect">
@@ -12383,7 +13340,7 @@
                 <a:ea typeface="Arial"/>
                 <a:cs typeface="Arial"/>
               </a:rPr>
-              <a:t xml:space="preserve">PASS</a:t>
+              <a:t xml:space="preserve">It proposes. You sequence.</a:t>
             </a:r>
             <a:endParaRPr lang="en-US" sz="3150"/>
           </a:p>
@@ -12432,7 +13389,7 @@
                 <a:ea typeface="Arial"/>
                 <a:cs typeface="Arial"/>
               </a:rPr>
-              <a:t xml:space="preserve">Code Is Cheap. Judgment Is Expensive.</a:t>
+              <a:t xml:space="preserve">Turn Your Thinkin' Tokens Up to 11</a:t>
             </a:r>
             <a:endParaRPr lang="en-US" sz="975"/>
           </a:p>
